--- a/S1-CL3-Cloud-Infrastructure-Improvement/delivery/topic_07/Topic_07_Slides.pptx
+++ b/S1-CL3-Cloud-Infrastructure-Improvement/delivery/topic_07/Topic_07_Slides.pptx
@@ -7617,7 +7617,7 @@
                 </a:solidFill>
                 <a:latin typeface="Roboto"/>
               </a:rPr>
-              <a:t>On the practice engagement, deploy the approved baseline, then apply the improvement as a change-set in us-east-1.</a:t>
+              <a:t>On the practice engagement (the website), deploy the single-AZ baseline, then apply YOUR OWN improvement as a change-set in us-east-1.</a:t>
             </a:r>
           </a:p>
           <a:p>
@@ -7648,7 +7648,7 @@
                 </a:solidFill>
                 <a:latin typeface="Roboto"/>
               </a:rPr>
-              <a:t>Review the diff before executing; confirm the DB tier is unchanged and the app-tier improvement is live.</a:t>
+              <a:t>Review the diff before executing; confirm the change-set applies the changes you intended, note which are in-place modifies vs replacements, and check the improvement is live.</a:t>
             </a:r>
           </a:p>
         </p:txBody>

--- a/S1-CL3-Cloud-Infrastructure-Improvement/delivery/topic_07/Topic_07_Slides.pptx
+++ b/S1-CL3-Cloud-Infrastructure-Improvement/delivery/topic_07/Topic_07_Slides.pptx
@@ -3386,7 +3386,7 @@
           <a:noFill/>
         </p:spPr>
         <p:txBody>
-          <a:bodyPr wrap="square" anchor="t" lIns="0" rIns="0" tIns="0" bIns="0">
+          <a:bodyPr wrap="square" anchor="ctr" lIns="0" rIns="0" tIns="0" bIns="0">
             <a:spAutoFit/>
           </a:bodyPr>
           <a:lstStyle/>
@@ -3403,7 +3403,7 @@
               </a:spcAft>
             </a:pPr>
             <a:r>
-              <a:rPr sz="1800" b="1" i="0">
+              <a:rPr sz="2400" b="1" i="0">
                 <a:solidFill>
                   <a:srgbClr val="EDAB0C"/>
                 </a:solidFill>
@@ -3412,7 +3412,7 @@
               <a:t>■  </a:t>
             </a:r>
             <a:r>
-              <a:rPr sz="1800" b="0" i="0">
+              <a:rPr sz="2400" b="0" i="0">
                 <a:solidFill>
                   <a:srgbClr val="2A2929"/>
                 </a:solidFill>
@@ -3434,7 +3434,7 @@
               </a:spcAft>
             </a:pPr>
             <a:r>
-              <a:rPr sz="1800" b="1" i="0">
+              <a:rPr sz="2400" b="1" i="0">
                 <a:solidFill>
                   <a:srgbClr val="EDAB0C"/>
                 </a:solidFill>
@@ -3443,7 +3443,7 @@
               <a:t>■  </a:t>
             </a:r>
             <a:r>
-              <a:rPr sz="1800" b="0" i="0">
+              <a:rPr sz="2400" b="0" i="0">
                 <a:solidFill>
                   <a:srgbClr val="2A2929"/>
                 </a:solidFill>
@@ -3465,7 +3465,7 @@
               </a:spcAft>
             </a:pPr>
             <a:r>
-              <a:rPr sz="1800" b="1" i="0">
+              <a:rPr sz="2400" b="1" i="0">
                 <a:solidFill>
                   <a:srgbClr val="EDAB0C"/>
                 </a:solidFill>
@@ -3474,7 +3474,7 @@
               <a:t>■  </a:t>
             </a:r>
             <a:r>
-              <a:rPr sz="1800" b="0" i="0">
+              <a:rPr sz="2400" b="0" i="0">
                 <a:solidFill>
                   <a:srgbClr val="2A2929"/>
                 </a:solidFill>
@@ -4020,7 +4020,7 @@
           <a:noFill/>
         </p:spPr>
         <p:txBody>
-          <a:bodyPr wrap="square" anchor="t" lIns="0" rIns="0" tIns="0" bIns="0">
+          <a:bodyPr wrap="square" anchor="ctr" lIns="0" rIns="0" tIns="0" bIns="0">
             <a:spAutoFit/>
           </a:bodyPr>
           <a:lstStyle/>
@@ -4037,7 +4037,7 @@
               </a:spcAft>
             </a:pPr>
             <a:r>
-              <a:rPr sz="1800" b="1" i="0">
+              <a:rPr sz="2400" b="1" i="0">
                 <a:solidFill>
                   <a:srgbClr val="EDAB0C"/>
                 </a:solidFill>
@@ -4046,7 +4046,7 @@
               <a:t>■  </a:t>
             </a:r>
             <a:r>
-              <a:rPr sz="1800" b="0" i="0">
+              <a:rPr sz="2400" b="0" i="0">
                 <a:solidFill>
                   <a:srgbClr val="2A2929"/>
                 </a:solidFill>
@@ -4068,7 +4068,7 @@
               </a:spcAft>
             </a:pPr>
             <a:r>
-              <a:rPr sz="1800" b="1" i="0">
+              <a:rPr sz="2400" b="1" i="0">
                 <a:solidFill>
                   <a:srgbClr val="EDAB0C"/>
                 </a:solidFill>
@@ -4077,7 +4077,7 @@
               <a:t>■  </a:t>
             </a:r>
             <a:r>
-              <a:rPr sz="1800" b="0" i="0">
+              <a:rPr sz="2400" b="0" i="0">
                 <a:solidFill>
                   <a:srgbClr val="2A2929"/>
                 </a:solidFill>
@@ -4099,7 +4099,7 @@
               </a:spcAft>
             </a:pPr>
             <a:r>
-              <a:rPr sz="1800" b="1" i="0">
+              <a:rPr sz="2400" b="1" i="0">
                 <a:solidFill>
                   <a:srgbClr val="EDAB0C"/>
                 </a:solidFill>
@@ -4108,7 +4108,7 @@
               <a:t>■  </a:t>
             </a:r>
             <a:r>
-              <a:rPr sz="1800" b="0" i="0">
+              <a:rPr sz="2400" b="0" i="0">
                 <a:solidFill>
                   <a:srgbClr val="2A2929"/>
                 </a:solidFill>
@@ -4362,7 +4362,7 @@
           <a:noFill/>
         </p:spPr>
         <p:txBody>
-          <a:bodyPr wrap="square" anchor="t" lIns="0" rIns="0" tIns="0" bIns="0">
+          <a:bodyPr wrap="square" anchor="ctr" lIns="0" rIns="0" tIns="0" bIns="0">
             <a:spAutoFit/>
           </a:bodyPr>
           <a:lstStyle/>
@@ -4379,7 +4379,7 @@
               </a:spcAft>
             </a:pPr>
             <a:r>
-              <a:rPr sz="1800" b="1" i="0">
+              <a:rPr sz="2400" b="1" i="0">
                 <a:solidFill>
                   <a:srgbClr val="EDAB0C"/>
                 </a:solidFill>
@@ -4388,7 +4388,7 @@
               <a:t>■  </a:t>
             </a:r>
             <a:r>
-              <a:rPr sz="1800" b="0" i="0">
+              <a:rPr sz="2400" b="0" i="0">
                 <a:solidFill>
                   <a:srgbClr val="2A2929"/>
                 </a:solidFill>
@@ -4410,7 +4410,7 @@
               </a:spcAft>
             </a:pPr>
             <a:r>
-              <a:rPr sz="1800" b="1" i="0">
+              <a:rPr sz="2400" b="1" i="0">
                 <a:solidFill>
                   <a:srgbClr val="EDAB0C"/>
                 </a:solidFill>
@@ -4419,7 +4419,7 @@
               <a:t>■  </a:t>
             </a:r>
             <a:r>
-              <a:rPr sz="1800" b="0" i="0">
+              <a:rPr sz="2400" b="0" i="0">
                 <a:solidFill>
                   <a:srgbClr val="2A2929"/>
                 </a:solidFill>
@@ -4441,7 +4441,7 @@
               </a:spcAft>
             </a:pPr>
             <a:r>
-              <a:rPr sz="1800" b="1" i="0">
+              <a:rPr sz="2400" b="1" i="0">
                 <a:solidFill>
                   <a:srgbClr val="EDAB0C"/>
                 </a:solidFill>
@@ -4450,7 +4450,7 @@
               <a:t>■  </a:t>
             </a:r>
             <a:r>
-              <a:rPr sz="1800" b="0" i="0">
+              <a:rPr sz="2400" b="0" i="0">
                 <a:solidFill>
                   <a:srgbClr val="2A2929"/>
                 </a:solidFill>
@@ -4996,7 +4996,7 @@
           <a:noFill/>
         </p:spPr>
         <p:txBody>
-          <a:bodyPr wrap="square" anchor="t" lIns="0" rIns="0" tIns="0" bIns="0">
+          <a:bodyPr wrap="square" anchor="ctr" lIns="0" rIns="0" tIns="0" bIns="0">
             <a:spAutoFit/>
           </a:bodyPr>
           <a:lstStyle/>
@@ -5013,7 +5013,7 @@
               </a:spcAft>
             </a:pPr>
             <a:r>
-              <a:rPr sz="1800" b="1" i="0">
+              <a:rPr sz="2400" b="1" i="0">
                 <a:solidFill>
                   <a:srgbClr val="EDAB0C"/>
                 </a:solidFill>
@@ -5022,7 +5022,7 @@
               <a:t>■  </a:t>
             </a:r>
             <a:r>
-              <a:rPr sz="1800" b="0" i="0">
+              <a:rPr sz="2400" b="0" i="0">
                 <a:solidFill>
                   <a:srgbClr val="2A2929"/>
                 </a:solidFill>
@@ -5044,7 +5044,7 @@
               </a:spcAft>
             </a:pPr>
             <a:r>
-              <a:rPr sz="1800" b="1" i="0">
+              <a:rPr sz="2400" b="1" i="0">
                 <a:solidFill>
                   <a:srgbClr val="EDAB0C"/>
                 </a:solidFill>
@@ -5053,7 +5053,7 @@
               <a:t>■  </a:t>
             </a:r>
             <a:r>
-              <a:rPr sz="1800" b="0" i="0">
+              <a:rPr sz="2400" b="0" i="0">
                 <a:solidFill>
                   <a:srgbClr val="2A2929"/>
                 </a:solidFill>
@@ -5075,7 +5075,7 @@
               </a:spcAft>
             </a:pPr>
             <a:r>
-              <a:rPr sz="1800" b="1" i="0">
+              <a:rPr sz="2400" b="1" i="0">
                 <a:solidFill>
                   <a:srgbClr val="EDAB0C"/>
                 </a:solidFill>
@@ -5084,7 +5084,7 @@
               <a:t>■  </a:t>
             </a:r>
             <a:r>
-              <a:rPr sz="1800" b="0" i="0">
+              <a:rPr sz="2400" b="0" i="0">
                 <a:solidFill>
                   <a:srgbClr val="2A2929"/>
                 </a:solidFill>
@@ -6349,7 +6349,7 @@
           <a:noFill/>
         </p:spPr>
         <p:txBody>
-          <a:bodyPr wrap="square" anchor="t" lIns="0" rIns="0" tIns="0" bIns="0">
+          <a:bodyPr wrap="square" anchor="ctr" lIns="0" rIns="0" tIns="0" bIns="0">
             <a:spAutoFit/>
           </a:bodyPr>
           <a:lstStyle/>
@@ -6366,7 +6366,7 @@
               </a:spcAft>
             </a:pPr>
             <a:r>
-              <a:rPr sz="1800" b="1" i="0">
+              <a:rPr sz="2400" b="1" i="0">
                 <a:solidFill>
                   <a:srgbClr val="EDAB0C"/>
                 </a:solidFill>
@@ -6375,7 +6375,7 @@
               <a:t>■  </a:t>
             </a:r>
             <a:r>
-              <a:rPr sz="1800" b="0" i="0">
+              <a:rPr sz="2400" b="0" i="0">
                 <a:solidFill>
                   <a:srgbClr val="2A2929"/>
                 </a:solidFill>
@@ -6397,7 +6397,7 @@
               </a:spcAft>
             </a:pPr>
             <a:r>
-              <a:rPr sz="1800" b="1" i="0">
+              <a:rPr sz="2400" b="1" i="0">
                 <a:solidFill>
                   <a:srgbClr val="EDAB0C"/>
                 </a:solidFill>
@@ -6406,7 +6406,7 @@
               <a:t>■  </a:t>
             </a:r>
             <a:r>
-              <a:rPr sz="1800" b="0" i="0">
+              <a:rPr sz="2400" b="0" i="0">
                 <a:solidFill>
                   <a:srgbClr val="2A2929"/>
                 </a:solidFill>
@@ -6428,7 +6428,7 @@
               </a:spcAft>
             </a:pPr>
             <a:r>
-              <a:rPr sz="1800" b="1" i="0">
+              <a:rPr sz="2400" b="1" i="0">
                 <a:solidFill>
                   <a:srgbClr val="EDAB0C"/>
                 </a:solidFill>
@@ -6437,7 +6437,7 @@
               <a:t>■  </a:t>
             </a:r>
             <a:r>
-              <a:rPr sz="1800" b="0" i="0">
+              <a:rPr sz="2400" b="0" i="0">
                 <a:solidFill>
                   <a:srgbClr val="2A2929"/>
                 </a:solidFill>
@@ -8268,7 +8268,7 @@
           <a:noFill/>
         </p:spPr>
         <p:txBody>
-          <a:bodyPr wrap="square" anchor="t" lIns="0" rIns="0" tIns="0" bIns="0">
+          <a:bodyPr wrap="square" anchor="ctr" lIns="0" rIns="0" tIns="0" bIns="0">
             <a:spAutoFit/>
           </a:bodyPr>
           <a:lstStyle/>
@@ -8285,7 +8285,7 @@
               </a:spcAft>
             </a:pPr>
             <a:r>
-              <a:rPr sz="1800" b="1" i="0">
+              <a:rPr sz="2400" b="1" i="0">
                 <a:solidFill>
                   <a:srgbClr val="EDAB0C"/>
                 </a:solidFill>
@@ -8294,7 +8294,7 @@
               <a:t>■  </a:t>
             </a:r>
             <a:r>
-              <a:rPr sz="1800" b="0" i="0">
+              <a:rPr sz="2400" b="0" i="0">
                 <a:solidFill>
                   <a:srgbClr val="2A2929"/>
                 </a:solidFill>
@@ -8316,7 +8316,7 @@
               </a:spcAft>
             </a:pPr>
             <a:r>
-              <a:rPr sz="1800" b="1" i="0">
+              <a:rPr sz="2400" b="1" i="0">
                 <a:solidFill>
                   <a:srgbClr val="EDAB0C"/>
                 </a:solidFill>
@@ -8325,7 +8325,7 @@
               <a:t>■  </a:t>
             </a:r>
             <a:r>
-              <a:rPr sz="1800" b="0" i="0">
+              <a:rPr sz="2400" b="0" i="0">
                 <a:solidFill>
                   <a:srgbClr val="2A2929"/>
                 </a:solidFill>
@@ -8347,7 +8347,7 @@
               </a:spcAft>
             </a:pPr>
             <a:r>
-              <a:rPr sz="1800" b="1" i="0">
+              <a:rPr sz="2400" b="1" i="0">
                 <a:solidFill>
                   <a:srgbClr val="EDAB0C"/>
                 </a:solidFill>
@@ -8356,7 +8356,7 @@
               <a:t>■  </a:t>
             </a:r>
             <a:r>
-              <a:rPr sz="1800" b="0" i="0">
+              <a:rPr sz="2400" b="0" i="0">
                 <a:solidFill>
                   <a:srgbClr val="2A2929"/>
                 </a:solidFill>

--- a/S1-CL3-Cloud-Infrastructure-Improvement/delivery/topic_07/Topic_07_Slides.pptx
+++ b/S1-CL3-Cloud-Infrastructure-Improvement/delivery/topic_07/Topic_07_Slides.pptx
@@ -7,21 +7,21 @@
   <p:sldIdLst>
     <p:sldId id="256" r:id="rId7"/>
     <p:sldId id="257" r:id="rId8"/>
-    <p:sldId id="258" r:id="rId9"/>
-    <p:sldId id="259" r:id="rId10"/>
-    <p:sldId id="260" r:id="rId11"/>
-    <p:sldId id="261" r:id="rId12"/>
-    <p:sldId id="262" r:id="rId13"/>
-    <p:sldId id="263" r:id="rId14"/>
-    <p:sldId id="264" r:id="rId15"/>
-    <p:sldId id="265" r:id="rId16"/>
-    <p:sldId id="266" r:id="rId17"/>
-    <p:sldId id="267" r:id="rId18"/>
-    <p:sldId id="268" r:id="rId19"/>
-    <p:sldId id="269" r:id="rId20"/>
-    <p:sldId id="270" r:id="rId21"/>
-    <p:sldId id="271" r:id="rId22"/>
-    <p:sldId id="272" r:id="rId23"/>
+    <p:sldId id="258" r:id="rId10"/>
+    <p:sldId id="259" r:id="rId11"/>
+    <p:sldId id="260" r:id="rId12"/>
+    <p:sldId id="261" r:id="rId13"/>
+    <p:sldId id="262" r:id="rId14"/>
+    <p:sldId id="263" r:id="rId15"/>
+    <p:sldId id="264" r:id="rId16"/>
+    <p:sldId id="265" r:id="rId17"/>
+    <p:sldId id="266" r:id="rId18"/>
+    <p:sldId id="267" r:id="rId19"/>
+    <p:sldId id="268" r:id="rId20"/>
+    <p:sldId id="269" r:id="rId21"/>
+    <p:sldId id="270" r:id="rId22"/>
+    <p:sldId id="271" r:id="rId23"/>
+    <p:sldId id="272" r:id="rId24"/>
   </p:sldIdLst>
   <p:sldSz cx="12191695" cy="6858000" type="screen4x3"/>
   <p:notesSz cx="6858000" cy="9144000"/>
@@ -121,6 +121,1829 @@
     </a:lvl9pPr>
   </p:defaultTextStyle>
 </p:presentation>
+</file>
+
+<file path=ppt/notesMasters/notesMaster1.xml><?xml version="1.0" encoding="utf-8"?>
+<p:notesMaster xmlns:a="http://schemas.openxmlformats.org/drawingml/2006/main" xmlns:p="http://schemas.openxmlformats.org/presentationml/2006/main" xmlns:r="http://schemas.openxmlformats.org/officeDocument/2006/relationships">
+  <p:cSld>
+    <p:bg>
+      <p:bgRef idx="1001">
+        <a:schemeClr val="bg1"/>
+      </p:bgRef>
+    </p:bg>
+    <p:spTree>
+      <p:nvGrpSpPr>
+        <p:cNvPr id="1" name=""/>
+        <p:cNvGrpSpPr/>
+        <p:nvPr/>
+      </p:nvGrpSpPr>
+      <p:grpSpPr>
+        <a:xfrm>
+          <a:off x="0" y="0"/>
+          <a:ext cx="0" cy="0"/>
+          <a:chOff x="0" y="0"/>
+          <a:chExt cx="0" cy="0"/>
+        </a:xfrm>
+      </p:grpSpPr>
+      <p:sp>
+        <p:nvSpPr>
+          <p:cNvPr id="2" name="Header Placeholder 1"/>
+          <p:cNvSpPr>
+            <a:spLocks noGrp="1"/>
+          </p:cNvSpPr>
+          <p:nvPr>
+            <p:ph type="hdr" sz="quarter"/>
+          </p:nvPr>
+        </p:nvSpPr>
+        <p:spPr>
+          <a:xfrm>
+            <a:off x="0" y="0"/>
+            <a:ext cx="2971800" cy="457200"/>
+          </a:xfrm>
+          <a:prstGeom prst="rect">
+            <a:avLst/>
+          </a:prstGeom>
+        </p:spPr>
+        <p:txBody>
+          <a:bodyPr vert="horz" lIns="91440" tIns="45720" rIns="91440" bIns="45720" rtlCol="0"/>
+          <a:lstStyle>
+            <a:lvl1pPr algn="l">
+              <a:defRPr sz="1200"/>
+            </a:lvl1pPr>
+          </a:lstStyle>
+          <a:p>
+            <a:endParaRPr lang="en-US"/>
+          </a:p>
+        </p:txBody>
+      </p:sp>
+      <p:sp>
+        <p:nvSpPr>
+          <p:cNvPr id="3" name="Date Placeholder 2"/>
+          <p:cNvSpPr>
+            <a:spLocks noGrp="1"/>
+          </p:cNvSpPr>
+          <p:nvPr>
+            <p:ph type="dt" idx="1"/>
+          </p:nvPr>
+        </p:nvSpPr>
+        <p:spPr>
+          <a:xfrm>
+            <a:off x="3884613" y="0"/>
+            <a:ext cx="2971800" cy="457200"/>
+          </a:xfrm>
+          <a:prstGeom prst="rect">
+            <a:avLst/>
+          </a:prstGeom>
+        </p:spPr>
+        <p:txBody>
+          <a:bodyPr vert="horz" lIns="91440" tIns="45720" rIns="91440" bIns="45720" rtlCol="0"/>
+          <a:lstStyle>
+            <a:lvl1pPr algn="r">
+              <a:defRPr sz="1200"/>
+            </a:lvl1pPr>
+          </a:lstStyle>
+          <a:p>
+            <a:fld id="{0F89C1C7-3DCD-1040-A9CF-14679D8B5DDD}" type="datetimeFigureOut">
+              <a:rPr lang="en-US" smtClean="0"/>
+              <a:t>10/17/16</a:t>
+            </a:fld>
+            <a:endParaRPr lang="en-US"/>
+          </a:p>
+        </p:txBody>
+      </p:sp>
+      <p:sp>
+        <p:nvSpPr>
+          <p:cNvPr id="4" name="Slide Image Placeholder 3"/>
+          <p:cNvSpPr>
+            <a:spLocks noGrp="1" noRot="1" noChangeAspect="1"/>
+          </p:cNvSpPr>
+          <p:nvPr>
+            <p:ph type="sldImg" idx="2"/>
+          </p:nvPr>
+        </p:nvSpPr>
+        <p:spPr>
+          <a:xfrm>
+            <a:off x="1143000" y="685800"/>
+            <a:ext cx="4572000" cy="3429000"/>
+          </a:xfrm>
+          <a:prstGeom prst="rect">
+            <a:avLst/>
+          </a:prstGeom>
+          <a:noFill/>
+          <a:ln w="12700">
+            <a:solidFill>
+              <a:prstClr val="black"/>
+            </a:solidFill>
+          </a:ln>
+        </p:spPr>
+        <p:txBody>
+          <a:bodyPr vert="horz" lIns="91440" tIns="45720" rIns="91440" bIns="45720" rtlCol="0" anchor="ctr"/>
+          <a:lstStyle/>
+          <a:p>
+            <a:endParaRPr lang="en-US"/>
+          </a:p>
+        </p:txBody>
+      </p:sp>
+      <p:sp>
+        <p:nvSpPr>
+          <p:cNvPr id="5" name="Notes Placeholder 4"/>
+          <p:cNvSpPr>
+            <a:spLocks noGrp="1"/>
+          </p:cNvSpPr>
+          <p:nvPr>
+            <p:ph type="body" sz="quarter" idx="3"/>
+          </p:nvPr>
+        </p:nvSpPr>
+        <p:spPr>
+          <a:xfrm>
+            <a:off x="685800" y="4343400"/>
+            <a:ext cx="5486400" cy="4114800"/>
+          </a:xfrm>
+          <a:prstGeom prst="rect">
+            <a:avLst/>
+          </a:prstGeom>
+        </p:spPr>
+        <p:txBody>
+          <a:bodyPr vert="horz" lIns="91440" tIns="45720" rIns="91440" bIns="45720" rtlCol="0"/>
+          <a:lstStyle/>
+          <a:p>
+            <a:pPr lvl="0"/>
+            <a:r>
+              <a:rPr lang="en-US" smtClean="0"/>
+              <a:t>Click to edit Master text styles</a:t>
+            </a:r>
+          </a:p>
+          <a:p>
+            <a:pPr lvl="1"/>
+            <a:r>
+              <a:rPr lang="en-US" smtClean="0"/>
+              <a:t>Second level</a:t>
+            </a:r>
+          </a:p>
+          <a:p>
+            <a:pPr lvl="2"/>
+            <a:r>
+              <a:rPr lang="en-US" smtClean="0"/>
+              <a:t>Third level</a:t>
+            </a:r>
+          </a:p>
+          <a:p>
+            <a:pPr lvl="3"/>
+            <a:r>
+              <a:rPr lang="en-US" smtClean="0"/>
+              <a:t>Fourth level</a:t>
+            </a:r>
+          </a:p>
+          <a:p>
+            <a:pPr lvl="4"/>
+            <a:r>
+              <a:rPr lang="en-US" smtClean="0"/>
+              <a:t>Fifth level</a:t>
+            </a:r>
+            <a:endParaRPr lang="en-US"/>
+          </a:p>
+        </p:txBody>
+      </p:sp>
+      <p:sp>
+        <p:nvSpPr>
+          <p:cNvPr id="6" name="Footer Placeholder 5"/>
+          <p:cNvSpPr>
+            <a:spLocks noGrp="1"/>
+          </p:cNvSpPr>
+          <p:nvPr>
+            <p:ph type="ftr" sz="quarter" idx="4"/>
+          </p:nvPr>
+        </p:nvSpPr>
+        <p:spPr>
+          <a:xfrm>
+            <a:off x="0" y="8685213"/>
+            <a:ext cx="2971800" cy="457200"/>
+          </a:xfrm>
+          <a:prstGeom prst="rect">
+            <a:avLst/>
+          </a:prstGeom>
+        </p:spPr>
+        <p:txBody>
+          <a:bodyPr vert="horz" lIns="91440" tIns="45720" rIns="91440" bIns="45720" rtlCol="0" anchor="b"/>
+          <a:lstStyle>
+            <a:lvl1pPr algn="l">
+              <a:defRPr sz="1200"/>
+            </a:lvl1pPr>
+          </a:lstStyle>
+          <a:p>
+            <a:endParaRPr lang="en-US"/>
+          </a:p>
+        </p:txBody>
+      </p:sp>
+      <p:sp>
+        <p:nvSpPr>
+          <p:cNvPr id="7" name="Slide Number Placeholder 6"/>
+          <p:cNvSpPr>
+            <a:spLocks noGrp="1"/>
+          </p:cNvSpPr>
+          <p:nvPr>
+            <p:ph type="sldNum" sz="quarter" idx="5"/>
+          </p:nvPr>
+        </p:nvSpPr>
+        <p:spPr>
+          <a:xfrm>
+            <a:off x="3884613" y="8685213"/>
+            <a:ext cx="2971800" cy="457200"/>
+          </a:xfrm>
+          <a:prstGeom prst="rect">
+            <a:avLst/>
+          </a:prstGeom>
+        </p:spPr>
+        <p:txBody>
+          <a:bodyPr vert="horz" lIns="91440" tIns="45720" rIns="91440" bIns="45720" rtlCol="0" anchor="b"/>
+          <a:lstStyle>
+            <a:lvl1pPr algn="r">
+              <a:defRPr sz="1200"/>
+            </a:lvl1pPr>
+          </a:lstStyle>
+          <a:p>
+            <a:fld id="{BB5E49A5-4136-284D-997B-48E1D791AD67}" type="slidenum">
+              <a:rPr lang="en-US" smtClean="0"/>
+              <a:t>‹#›</a:t>
+            </a:fld>
+            <a:endParaRPr lang="en-US"/>
+          </a:p>
+        </p:txBody>
+      </p:sp>
+    </p:spTree>
+    <p:extLst>
+      <p:ext uri="{BB962C8B-B14F-4D97-AF65-F5344CB8AC3E}">
+        <p14:creationId xmlns:p14="http://schemas.microsoft.com/office/powerpoint/2010/main" val="2623252185"/>
+      </p:ext>
+    </p:extLst>
+  </p:cSld>
+  <p:clrMap bg1="lt1" tx1="dk1" bg2="lt2" tx2="dk2" accent1="accent1" accent2="accent2" accent3="accent3" accent4="accent4" accent5="accent5" accent6="accent6" hlink="hlink" folHlink="folHlink"/>
+  <p:notesStyle>
+    <a:lvl1pPr marL="0" algn="l" defTabSz="457200" rtl="0" eaLnBrk="1" latinLnBrk="0" hangingPunct="1">
+      <a:defRPr sz="1200" kern="1200">
+        <a:solidFill>
+          <a:schemeClr val="tx1"/>
+        </a:solidFill>
+        <a:latin typeface="+mn-lt"/>
+        <a:ea typeface="+mn-ea"/>
+        <a:cs typeface="+mn-cs"/>
+      </a:defRPr>
+    </a:lvl1pPr>
+    <a:lvl2pPr marL="457200" algn="l" defTabSz="457200" rtl="0" eaLnBrk="1" latinLnBrk="0" hangingPunct="1">
+      <a:defRPr sz="1200" kern="1200">
+        <a:solidFill>
+          <a:schemeClr val="tx1"/>
+        </a:solidFill>
+        <a:latin typeface="+mn-lt"/>
+        <a:ea typeface="+mn-ea"/>
+        <a:cs typeface="+mn-cs"/>
+      </a:defRPr>
+    </a:lvl2pPr>
+    <a:lvl3pPr marL="914400" algn="l" defTabSz="457200" rtl="0" eaLnBrk="1" latinLnBrk="0" hangingPunct="1">
+      <a:defRPr sz="1200" kern="1200">
+        <a:solidFill>
+          <a:schemeClr val="tx1"/>
+        </a:solidFill>
+        <a:latin typeface="+mn-lt"/>
+        <a:ea typeface="+mn-ea"/>
+        <a:cs typeface="+mn-cs"/>
+      </a:defRPr>
+    </a:lvl3pPr>
+    <a:lvl4pPr marL="1371600" algn="l" defTabSz="457200" rtl="0" eaLnBrk="1" latinLnBrk="0" hangingPunct="1">
+      <a:defRPr sz="1200" kern="1200">
+        <a:solidFill>
+          <a:schemeClr val="tx1"/>
+        </a:solidFill>
+        <a:latin typeface="+mn-lt"/>
+        <a:ea typeface="+mn-ea"/>
+        <a:cs typeface="+mn-cs"/>
+      </a:defRPr>
+    </a:lvl4pPr>
+    <a:lvl5pPr marL="1828800" algn="l" defTabSz="457200" rtl="0" eaLnBrk="1" latinLnBrk="0" hangingPunct="1">
+      <a:defRPr sz="1200" kern="1200">
+        <a:solidFill>
+          <a:schemeClr val="tx1"/>
+        </a:solidFill>
+        <a:latin typeface="+mn-lt"/>
+        <a:ea typeface="+mn-ea"/>
+        <a:cs typeface="+mn-cs"/>
+      </a:defRPr>
+    </a:lvl5pPr>
+    <a:lvl6pPr marL="2286000" algn="l" defTabSz="457200" rtl="0" eaLnBrk="1" latinLnBrk="0" hangingPunct="1">
+      <a:defRPr sz="1200" kern="1200">
+        <a:solidFill>
+          <a:schemeClr val="tx1"/>
+        </a:solidFill>
+        <a:latin typeface="+mn-lt"/>
+        <a:ea typeface="+mn-ea"/>
+        <a:cs typeface="+mn-cs"/>
+      </a:defRPr>
+    </a:lvl6pPr>
+    <a:lvl7pPr marL="2743200" algn="l" defTabSz="457200" rtl="0" eaLnBrk="1" latinLnBrk="0" hangingPunct="1">
+      <a:defRPr sz="1200" kern="1200">
+        <a:solidFill>
+          <a:schemeClr val="tx1"/>
+        </a:solidFill>
+        <a:latin typeface="+mn-lt"/>
+        <a:ea typeface="+mn-ea"/>
+        <a:cs typeface="+mn-cs"/>
+      </a:defRPr>
+    </a:lvl7pPr>
+    <a:lvl8pPr marL="3200400" algn="l" defTabSz="457200" rtl="0" eaLnBrk="1" latinLnBrk="0" hangingPunct="1">
+      <a:defRPr sz="1200" kern="1200">
+        <a:solidFill>
+          <a:schemeClr val="tx1"/>
+        </a:solidFill>
+        <a:latin typeface="+mn-lt"/>
+        <a:ea typeface="+mn-ea"/>
+        <a:cs typeface="+mn-cs"/>
+      </a:defRPr>
+    </a:lvl8pPr>
+    <a:lvl9pPr marL="3657600" algn="l" defTabSz="457200" rtl="0" eaLnBrk="1" latinLnBrk="0" hangingPunct="1">
+      <a:defRPr sz="1200" kern="1200">
+        <a:solidFill>
+          <a:schemeClr val="tx1"/>
+        </a:solidFill>
+        <a:latin typeface="+mn-lt"/>
+        <a:ea typeface="+mn-ea"/>
+        <a:cs typeface="+mn-cs"/>
+      </a:defRPr>
+    </a:lvl9pPr>
+  </p:notesStyle>
+</p:notesMaster>
+</file>
+
+<file path=ppt/notesSlides/notesSlide1.xml><?xml version="1.0" encoding="utf-8"?>
+<p:notes xmlns:a="http://schemas.openxmlformats.org/drawingml/2006/main" xmlns:p="http://schemas.openxmlformats.org/presentationml/2006/main" xmlns:r="http://schemas.openxmlformats.org/officeDocument/2006/relationships">
+  <p:cSld>
+    <p:spTree>
+      <p:nvGrpSpPr>
+        <p:cNvPr id="1" name=""/>
+        <p:cNvGrpSpPr/>
+        <p:nvPr/>
+      </p:nvGrpSpPr>
+      <p:grpSpPr>
+        <a:xfrm>
+          <a:off x="0" y="0"/>
+          <a:ext cx="0" cy="0"/>
+          <a:chOff x="0" y="0"/>
+          <a:chExt cx="0" cy="0"/>
+        </a:xfrm>
+      </p:grpSpPr>
+      <p:sp>
+        <p:nvSpPr>
+          <p:cNvPr id="2" name="Slide Image Placeholder 1"/>
+          <p:cNvSpPr>
+            <a:spLocks noGrp="1"/>
+          </p:cNvSpPr>
+          <p:nvPr>
+            <p:ph type="sldImg" idx="2"/>
+          </p:nvPr>
+        </p:nvSpPr>
+        <p:spPr/>
+      </p:sp>
+      <p:sp>
+        <p:nvSpPr>
+          <p:cNvPr id="3" name="Notes Placeholder 2"/>
+          <p:cNvSpPr>
+            <a:spLocks noGrp="1"/>
+          </p:cNvSpPr>
+          <p:nvPr>
+            <p:ph type="body" idx="3" sz="quarter"/>
+          </p:nvPr>
+        </p:nvSpPr>
+        <p:spPr/>
+        <p:txBody>
+          <a:bodyPr/>
+          <a:lstStyle/>
+          <a:p>
+            <a:r>
+              <a:t>Frame Topic 7 as the START of AT3 — AT2 wrote the IaC; now you DEPLOY, PROVE and REFINE it in the</a:t>
+            </a:r>
+          </a:p>
+          <a:p>
+            <a:r>
+              <a:t>lab. Set the deploy discipline; don't teach change-sets yet.</a:t>
+            </a:r>
+          </a:p>
+          <a:p>
+            <a:r>
+              <a:t>• First bullet: AT2 wrote the IaC; AT3 begins — deploy it, prove it, refine it.</a:t>
+            </a:r>
+          </a:p>
+          <a:p>
+            <a:r>
+              <a:t>• Second bullet: today's arc — stand up the approved Ledgerline baseline, apply the improvement as a</a:t>
+            </a:r>
+          </a:p>
+          <a:p>
+            <a:r>
+              <a:t>CHANGE-SET, then monitor, test and refine.</a:t>
+            </a:r>
+          </a:p>
+          <a:p>
+            <a:r>
+              <a:t>• Third bullet (say it explicitly): Region substitution applies to EVERY deploy — the design targets</a:t>
+            </a:r>
+          </a:p>
+          <a:p>
+            <a:r>
+              <a:t>Sydney (DR Melbourne) but you build in [scenario: ap-southeast-2 (Sydney) | deploy: us-east-1]. Same</a:t>
+            </a:r>
+          </a:p>
+          <a:p>
+            <a:r>
+              <a:t>build; only the console Region differs.</a:t>
+            </a:r>
+          </a:p>
+          <a:p>
+            <a:r>
+              <a:t>• Fourth bullet: the rhythm — teach → demo → practice: watch the deploy + change-set demo, then do it</a:t>
+            </a:r>
+          </a:p>
+          <a:p>
+            <a:r>
+              <a:t>on the practice engagement.</a:t>
+            </a:r>
+          </a:p>
+          <a:p>
+            <a:r>
+              <a:t>Misconception to pre-empt: "AT3 is a fresh build from scratch." No — you deploy the APPROVED baseline</a:t>
+            </a:r>
+          </a:p>
+          <a:p>
+            <a:r>
+              <a:t>first, then apply the improvement OVER it as a change-set. That apply-as-update discipline is the whole</a:t>
+            </a:r>
+          </a:p>
+          <a:p>
+            <a:r>
+              <a:t>Topic.</a:t>
+            </a:r>
+          </a:p>
+          <a:p>
+            <a:r>
+              <a:t>Question to pose: "Why deploy the baseline first and change-set the improvement, instead of just</a:t>
+            </a:r>
+          </a:p>
+          <a:p>
+            <a:r>
+              <a:t>deploying the improved stack directly?" (draws out the reviewable-diff, in-place, no-data-migration</a:t>
+            </a:r>
+          </a:p>
+          <a:p>
+            <a:r>
+              <a:t>reasoning).</a:t>
+            </a:r>
+          </a:p>
+          <a:p>
+            <a:r>
+              <a:t>UoC/AT3 tie: opens the AT3 deploy arc — ICTCLD504 el 3; everything today feeds the AT3 implementation</a:t>
+            </a:r>
+          </a:p>
+          <a:p>
+            <a:r>
+              <a:t>record (deploy, monitoring, test results, refinements).</a:t>
+            </a:r>
+          </a:p>
+        </p:txBody>
+      </p:sp>
+      <p:sp>
+        <p:nvSpPr>
+          <p:cNvPr id="4" name="Slide Number Placeholder 3"/>
+          <p:cNvSpPr>
+            <a:spLocks noGrp="1"/>
+          </p:cNvSpPr>
+          <p:nvPr>
+            <p:ph type="sldNum" idx="5" sz="quarter"/>
+          </p:nvPr>
+        </p:nvSpPr>
+        <p:spPr/>
+      </p:sp>
+    </p:spTree>
+  </p:cSld>
+  <p:clrMapOvr>
+    <a:masterClrMapping/>
+  </p:clrMapOvr>
+</p:notes>
+</file>
+
+<file path=ppt/notesSlides/notesSlide10.xml><?xml version="1.0" encoding="utf-8"?>
+<p:notes xmlns:a="http://schemas.openxmlformats.org/drawingml/2006/main" xmlns:p="http://schemas.openxmlformats.org/presentationml/2006/main" xmlns:r="http://schemas.openxmlformats.org/officeDocument/2006/relationships">
+  <p:cSld>
+    <p:spTree>
+      <p:nvGrpSpPr>
+        <p:cNvPr id="1" name=""/>
+        <p:cNvGrpSpPr/>
+        <p:nvPr/>
+      </p:nvGrpSpPr>
+      <p:grpSpPr>
+        <a:xfrm>
+          <a:off x="0" y="0"/>
+          <a:ext cx="0" cy="0"/>
+          <a:chOff x="0" y="0"/>
+          <a:chExt cx="0" cy="0"/>
+        </a:xfrm>
+      </p:grpSpPr>
+      <p:sp>
+        <p:nvSpPr>
+          <p:cNvPr id="2" name="Slide Image Placeholder 1"/>
+          <p:cNvSpPr>
+            <a:spLocks noGrp="1"/>
+          </p:cNvSpPr>
+          <p:nvPr>
+            <p:ph type="sldImg" idx="2"/>
+          </p:nvPr>
+        </p:nvSpPr>
+        <p:spPr/>
+      </p:sp>
+      <p:sp>
+        <p:nvSpPr>
+          <p:cNvPr id="3" name="Notes Placeholder 2"/>
+          <p:cNvSpPr>
+            <a:spLocks noGrp="1"/>
+          </p:cNvSpPr>
+          <p:nvPr>
+            <p:ph type="body" idx="3" sz="quarter"/>
+          </p:nvPr>
+        </p:nvSpPr>
+        <p:spPr/>
+        <p:txBody>
+          <a:bodyPr/>
+          <a:lstStyle/>
+          <a:p>
+            <a:r>
+              <a:t>Close the deploy loop — ACT on the test results now. PC 3.4 lands here.</a:t>
+            </a:r>
+          </a:p>
+          <a:p>
+            <a:r>
+              <a:t>• First bullet: apply SHORT-TERM refinements to the deployed resources according to the test results</a:t>
+            </a:r>
+          </a:p>
+          <a:p>
+            <a:r>
+              <a:t>(PC 3.4) — a threshold tweak, a scaling adjustment, a security-group tightening. Small, immediate</a:t>
+            </a:r>
+          </a:p>
+          <a:p>
+            <a:r>
+              <a:t>changes.</a:t>
+            </a:r>
+          </a:p>
+          <a:p>
+            <a:r>
+              <a:t>• Second bullet: SHORT-TERM = what you change NOW on the running system as a small follow-up</a:t>
+            </a:r>
+          </a:p>
+          <a:p>
+            <a:r>
+              <a:t>change-set; LONG-TERM strategy is Topic 8. Draw the line explicitly.</a:t>
+            </a:r>
+          </a:p>
+          <a:p>
+            <a:r>
+              <a:t>• Third bullet: RE-MEASURE after each refinement to confirm it moved the metric the right way — the</a:t>
+            </a:r>
+          </a:p>
+          <a:p>
+            <a:r>
+              <a:t>test → refine loop. A refinement you don't re-measure isn't finished.</a:t>
+            </a:r>
+          </a:p>
+          <a:p>
+            <a:r>
+              <a:t>Misconception to pre-empt: "short-term and long-term improvements are the same list." No — short-term</a:t>
+            </a:r>
+          </a:p>
+          <a:p>
+            <a:r>
+              <a:t>is applied now on the deployed stack (PC 3.4); long-term is described, not applied (Topic 8, PC 4.2).</a:t>
+            </a:r>
+          </a:p>
+          <a:p>
+            <a:r>
+              <a:t>Don't mix them.</a:t>
+            </a:r>
+          </a:p>
+          <a:p>
+            <a:r>
+              <a:t>Question to pose: "Your SPOF test showed failover was slow — what's a SHORT-TERM refinement you'd apply</a:t>
+            </a:r>
+          </a:p>
+          <a:p>
+            <a:r>
+              <a:t>now, and how do you confirm it worked?" (draws out tweak + re-measure).</a:t>
+            </a:r>
+          </a:p>
+          <a:p>
+            <a:r>
+              <a:t>UoC/AT3 tie: ICTCLD504 PC 3.4 (short-term refinements from test results) → the refinement evidence in</a:t>
+            </a:r>
+          </a:p>
+          <a:p>
+            <a:r>
+              <a:t>AT3; long-term strategy is Topic 8 (PC 4.2).</a:t>
+            </a:r>
+          </a:p>
+        </p:txBody>
+      </p:sp>
+      <p:sp>
+        <p:nvSpPr>
+          <p:cNvPr id="4" name="Slide Number Placeholder 3"/>
+          <p:cNvSpPr>
+            <a:spLocks noGrp="1"/>
+          </p:cNvSpPr>
+          <p:nvPr>
+            <p:ph type="sldNum" idx="5" sz="quarter"/>
+          </p:nvPr>
+        </p:nvSpPr>
+        <p:spPr/>
+      </p:sp>
+    </p:spTree>
+  </p:cSld>
+  <p:clrMapOvr>
+    <a:masterClrMapping/>
+  </p:clrMapOvr>
+</p:notes>
+</file>
+
+<file path=ppt/notesSlides/notesSlide2.xml><?xml version="1.0" encoding="utf-8"?>
+<p:notes xmlns:a="http://schemas.openxmlformats.org/drawingml/2006/main" xmlns:p="http://schemas.openxmlformats.org/presentationml/2006/main" xmlns:r="http://schemas.openxmlformats.org/officeDocument/2006/relationships">
+  <p:cSld>
+    <p:spTree>
+      <p:nvGrpSpPr>
+        <p:cNvPr id="1" name=""/>
+        <p:cNvGrpSpPr/>
+        <p:nvPr/>
+      </p:nvGrpSpPr>
+      <p:grpSpPr>
+        <a:xfrm>
+          <a:off x="0" y="0"/>
+          <a:ext cx="0" cy="0"/>
+          <a:chOff x="0" y="0"/>
+          <a:chExt cx="0" cy="0"/>
+        </a:xfrm>
+      </p:grpSpPr>
+      <p:sp>
+        <p:nvSpPr>
+          <p:cNvPr id="2" name="Slide Image Placeholder 1"/>
+          <p:cNvSpPr>
+            <a:spLocks noGrp="1"/>
+          </p:cNvSpPr>
+          <p:nvPr>
+            <p:ph type="sldImg" idx="2"/>
+          </p:nvPr>
+        </p:nvSpPr>
+        <p:spPr/>
+      </p:sp>
+      <p:sp>
+        <p:nvSpPr>
+          <p:cNvPr id="3" name="Notes Placeholder 2"/>
+          <p:cNvSpPr>
+            <a:spLocks noGrp="1"/>
+          </p:cNvSpPr>
+          <p:nvPr>
+            <p:ph type="body" idx="3" sz="quarter"/>
+          </p:nvPr>
+        </p:nvSpPr>
+        <p:spPr/>
+        <p:txBody>
+          <a:bodyPr/>
+          <a:lstStyle/>
+          <a:p>
+            <a:r>
+              <a:t>The primer for C1 — teach what a change-set IS and why the improvement lands as one. This is the</a:t>
+            </a:r>
+          </a:p>
+          <a:p>
+            <a:r>
+              <a:t>conceptual core of AT3.</a:t>
+            </a:r>
+          </a:p>
+          <a:p>
+            <a:r>
+              <a:t>• First bullet: deploy the approved BASELINE first, then apply the improvement AS A CHANGE-SET over it</a:t>
+            </a:r>
+          </a:p>
+          <a:p>
+            <a:r>
+              <a:t>— not a fresh, replacing stack. Two steps, in order.</a:t>
+            </a:r>
+          </a:p>
+          <a:p>
+            <a:r>
+              <a:t>• Second bullet: a change-set is a REVIEWABLE DIFF — you see exactly what will be added or modified</a:t>
+            </a:r>
+          </a:p>
+          <a:p>
+            <a:r>
+              <a:t>before it runs (in-place/additive — no resource replacement, no data migration). "Review before</a:t>
+            </a:r>
+          </a:p>
+          <a:p>
+            <a:r>
+              <a:t>execute" is the discipline.</a:t>
+            </a:r>
+          </a:p>
+          <a:p>
+            <a:r>
+              <a:t>• Third bullet: the improvement adds app-tier Multi-AZ and scaling; ENCRYPTION is already baseline, so</a:t>
+            </a:r>
+          </a:p>
+          <a:p>
+            <a:r>
+              <a:t>it is NOT part of this change. Scope the change precisely.</a:t>
+            </a:r>
+          </a:p>
+          <a:p>
+            <a:r>
+              <a:t>Misconception to pre-empt: "a change-set replaces the old resources with new ones." No — here it's</a:t>
+            </a:r>
+          </a:p>
+          <a:p>
+            <a:r>
+              <a:t>in-place/additive; replacement would mean data migration, which we explicitly avoid. Review the diff to</a:t>
+            </a:r>
+          </a:p>
+          <a:p>
+            <a:r>
+              <a:t>confirm modifies, not replaces.</a:t>
+            </a:r>
+          </a:p>
+          <a:p>
+            <a:r>
+              <a:t>Question to pose: "Before you execute a change-set, what should you check in the diff — and what would</a:t>
+            </a:r>
+          </a:p>
+          <a:p>
+            <a:r>
+              <a:t>a REPLACE on the database mean?" (draws out review-before-execute + why replace is dangerous).</a:t>
+            </a:r>
+          </a:p>
+          <a:p>
+            <a:r>
+              <a:t>UoC/AT3 tie: ICTCLD504 PC 3.1 (deploy approved architecture) + PE 4 (console/SDK/CLI) → the deploy</a:t>
+            </a:r>
+          </a:p>
+          <a:p>
+            <a:r>
+              <a:t>evidence in AT3; sets up the lab DB constraint next.</a:t>
+            </a:r>
+          </a:p>
+        </p:txBody>
+      </p:sp>
+      <p:sp>
+        <p:nvSpPr>
+          <p:cNvPr id="4" name="Slide Number Placeholder 3"/>
+          <p:cNvSpPr>
+            <a:spLocks noGrp="1"/>
+          </p:cNvSpPr>
+          <p:nvPr>
+            <p:ph type="sldNum" idx="5" sz="quarter"/>
+          </p:nvPr>
+        </p:nvSpPr>
+        <p:spPr/>
+      </p:sp>
+    </p:spTree>
+  </p:cSld>
+  <p:clrMapOvr>
+    <a:masterClrMapping/>
+  </p:clrMapOvr>
+</p:notes>
+</file>
+
+<file path=ppt/notesSlides/notesSlide3.xml><?xml version="1.0" encoding="utf-8"?>
+<p:notes xmlns:a="http://schemas.openxmlformats.org/drawingml/2006/main" xmlns:p="http://schemas.openxmlformats.org/presentationml/2006/main" xmlns:r="http://schemas.openxmlformats.org/officeDocument/2006/relationships">
+  <p:cSld>
+    <p:spTree>
+      <p:nvGrpSpPr>
+        <p:cNvPr id="1" name=""/>
+        <p:cNvGrpSpPr/>
+        <p:nvPr/>
+      </p:nvGrpSpPr>
+      <p:grpSpPr>
+        <a:xfrm>
+          <a:off x="0" y="0"/>
+          <a:ext cx="0" cy="0"/>
+          <a:chOff x="0" y="0"/>
+          <a:chExt cx="0" cy="0"/>
+        </a:xfrm>
+      </p:grpSpPr>
+      <p:sp>
+        <p:nvSpPr>
+          <p:cNvPr id="2" name="Slide Image Placeholder 1"/>
+          <p:cNvSpPr>
+            <a:spLocks noGrp="1"/>
+          </p:cNvSpPr>
+          <p:nvPr>
+            <p:ph type="sldImg" idx="2"/>
+          </p:nvPr>
+        </p:nvSpPr>
+        <p:spPr/>
+      </p:sp>
+      <p:sp>
+        <p:nvSpPr>
+          <p:cNvPr id="3" name="Notes Placeholder 2"/>
+          <p:cNvSpPr>
+            <a:spLocks noGrp="1"/>
+          </p:cNvSpPr>
+          <p:nvPr>
+            <p:ph type="body" idx="3" sz="quarter"/>
+          </p:nvPr>
+        </p:nvSpPr>
+        <p:spPr/>
+        <p:txBody>
+          <a:bodyPr/>
+          <a:lstStyle/>
+          <a:p>
+            <a:r>
+              <a:t>The lab reality that shapes the whole deploy — use the change-set-flow diagram (baseline → change-set</a:t>
+            </a:r>
+          </a:p>
+          <a:p>
+            <a:r>
+              <a:t>adds app-tier Multi-AZ + scaling, DB untouched → improved stack).</a:t>
+            </a:r>
+          </a:p>
+          <a:p>
+            <a:r>
+              <a:t>• First bullet: the change-set must NOT modify the database — the Learner Lab role denies</a:t>
+            </a:r>
+          </a:p>
+          <a:p>
+            <a:r>
+              <a:t>rds:ModifyDBInstance, so the DB tier is CREATE-ONLY. State the technical constraint plainly.</a:t>
+            </a:r>
+          </a:p>
+          <a:p>
+            <a:r>
+              <a:t>• Second bullet: therefore DB-tier DR (backup / cross-region) stays DESIGN-LEVEL (per AT1), and the</a:t>
+            </a:r>
+          </a:p>
+          <a:p>
+            <a:r>
+              <a:t>reliability demonstration lands on the APP tier. The constraint is honest, not a gap.</a:t>
+            </a:r>
+          </a:p>
+          <a:p>
+            <a:r>
+              <a:t>• Third bullet: deploy with the console, an SDK, or the CLI — whichever the platform exposes (PE 4);</a:t>
+            </a:r>
+          </a:p>
+          <a:p>
+            <a:r>
+              <a:t>the change-set targets the APP TIER only.</a:t>
+            </a:r>
+          </a:p>
+          <a:p>
+            <a:r>
+              <a:t>Misconception to pre-empt: "create-only means the database DR isn't assessed." No — it's designed and</a:t>
+            </a:r>
+          </a:p>
+          <a:p>
+            <a:r>
+              <a:t>evidenced at design level (AT1); the lab just can't apply it live, so the built demonstration moves to</a:t>
+            </a:r>
+          </a:p>
+          <a:p>
+            <a:r>
+              <a:t>the app tier. Nothing is dropped, only relocated.</a:t>
+            </a:r>
+          </a:p>
+          <a:p>
+            <a:r>
+              <a:t>Question to pose: "The lab denies rds:ModifyDBInstance — so where do you DEMONSTRATE reliability, and</a:t>
+            </a:r>
+          </a:p>
+          <a:p>
+            <a:r>
+              <a:t>where does DB-tier DR get evidenced instead?" (app tier live; DB tier at design level).</a:t>
+            </a:r>
+          </a:p>
+          <a:p>
+            <a:r>
+              <a:t>UoC/AT3 tie: ICTCLD504 PC 3.1 + PE 4 → the deploy is scoped to what the lab allows; the substitution</a:t>
+            </a:r>
+          </a:p>
+          <a:p>
+            <a:r>
+              <a:t>keeps the assessment honest (documented in the AT3 record).</a:t>
+            </a:r>
+          </a:p>
+        </p:txBody>
+      </p:sp>
+      <p:sp>
+        <p:nvSpPr>
+          <p:cNvPr id="4" name="Slide Number Placeholder 3"/>
+          <p:cNvSpPr>
+            <a:spLocks noGrp="1"/>
+          </p:cNvSpPr>
+          <p:nvPr>
+            <p:ph type="sldNum" idx="5" sz="quarter"/>
+          </p:nvPr>
+        </p:nvSpPr>
+        <p:spPr/>
+      </p:sp>
+    </p:spTree>
+  </p:cSld>
+  <p:clrMapOvr>
+    <a:masterClrMapping/>
+  </p:clrMapOvr>
+</p:notes>
+</file>
+
+<file path=ppt/notesSlides/notesSlide4.xml><?xml version="1.0" encoding="utf-8"?>
+<p:notes xmlns:a="http://schemas.openxmlformats.org/drawingml/2006/main" xmlns:p="http://schemas.openxmlformats.org/presentationml/2006/main" xmlns:r="http://schemas.openxmlformats.org/officeDocument/2006/relationships">
+  <p:cSld>
+    <p:spTree>
+      <p:nvGrpSpPr>
+        <p:cNvPr id="1" name=""/>
+        <p:cNvGrpSpPr/>
+        <p:nvPr/>
+      </p:nvGrpSpPr>
+      <p:grpSpPr>
+        <a:xfrm>
+          <a:off x="0" y="0"/>
+          <a:ext cx="0" cy="0"/>
+          <a:chOff x="0" y="0"/>
+          <a:chExt cx="0" cy="0"/>
+        </a:xfrm>
+      </p:grpSpPr>
+      <p:sp>
+        <p:nvSpPr>
+          <p:cNvPr id="2" name="Slide Image Placeholder 1"/>
+          <p:cNvSpPr>
+            <a:spLocks noGrp="1"/>
+          </p:cNvSpPr>
+          <p:nvPr>
+            <p:ph type="sldImg" idx="2"/>
+          </p:nvPr>
+        </p:nvSpPr>
+        <p:spPr/>
+      </p:sp>
+      <p:sp>
+        <p:nvSpPr>
+          <p:cNvPr id="3" name="Notes Placeholder 2"/>
+          <p:cNvSpPr>
+            <a:spLocks noGrp="1"/>
+          </p:cNvSpPr>
+          <p:nvPr>
+            <p:ph type="body" idx="3" sz="quarter"/>
+          </p:nvPr>
+        </p:nvSpPr>
+        <p:spPr/>
+        <p:txBody>
+          <a:bodyPr/>
+          <a:lstStyle/>
+          <a:p>
+            <a:r>
+              <a:t>DEMONSTRATION (educator-led, LIVE) — demonstrate the course's OWN deploy on the lab-pack in front of</a:t>
+            </a:r>
+          </a:p>
+          <a:p>
+            <a:r>
+              <a:t>the class, then students replicate on the practice engagement next slide. There is no recorded</a:t>
+            </a:r>
+          </a:p>
+          <a:p>
+            <a:r>
+              <a:t>substitute; screen your own live console/CLI.</a:t>
+            </a:r>
+          </a:p>
+          <a:p/>
+          <a:p>
+            <a:r>
+              <a:t>WHAT TO DEMONSTRATE (step by step, narrating as you go):</a:t>
+            </a:r>
+          </a:p>
+          <a:p>
+            <a:r>
+              <a:t>1. Deploy the approved BASELINE stack in the lab to CREATE_COMPLETE — set the console Region to</a:t>
+            </a:r>
+          </a:p>
+          <a:p>
+            <a:r>
+              <a:t>us-east-1 first ([scenario: ap-southeast-2 (Sydney) | deploy: us-east-1]); say the substitution out loud.</a:t>
+            </a:r>
+          </a:p>
+          <a:p>
+            <a:r>
+              <a:t>2. Create a CHANGE-SET for the improvement; open the diff and read it WITH the class — app-tier</a:t>
+            </a:r>
+          </a:p>
+          <a:p>
+            <a:r>
+              <a:t>Multi-AZ + scaling added; database untouched.</a:t>
+            </a:r>
+          </a:p>
+          <a:p>
+            <a:r>
+              <a:t>3. Execute the change-set; watch it to UPDATE_COMPLETE.</a:t>
+            </a:r>
+          </a:p>
+          <a:p>
+            <a:r>
+              <a:t>4. Confirm the improved resources in the console/CLI (the new app-tier instances, the scaling config).</a:t>
+            </a:r>
+          </a:p>
+          <a:p/>
+          <a:p>
+            <a:r>
+              <a:t>WHAT TO EMPHASISE:</a:t>
+            </a:r>
+          </a:p>
+          <a:p>
+            <a:r>
+              <a:t>• REVIEW THE DIFF BEFORE EXECUTING — pause on it; this is the discipline, not a formality. Point out</a:t>
+            </a:r>
+          </a:p>
+          <a:p>
+            <a:r>
+              <a:t>modifies vs any replaces.</a:t>
+            </a:r>
+          </a:p>
+          <a:p>
+            <a:r>
+              <a:t>• The DB tier shows NO changes in the diff — tie it back to the create-only constraint</a:t>
+            </a:r>
+          </a:p>
+          <a:p>
+            <a:r>
+              <a:t>(rds:ModifyDBInstance denied).</a:t>
+            </a:r>
+          </a:p>
+          <a:p>
+            <a:r>
+              <a:t>• Region visible before anything is created — model setting it first.</a:t>
+            </a:r>
+          </a:p>
+          <a:p>
+            <a:r>
+              <a:t>• Narrate the evidence capture — screenshot the diff and the CREATE_COMPLETE / UPDATE_COMPLETE states</a:t>
+            </a:r>
+          </a:p>
+          <a:p>
+            <a:r>
+              <a:t>as you go; students must mirror this in AT3.</a:t>
+            </a:r>
+          </a:p>
+          <a:p/>
+          <a:p>
+            <a:r>
+              <a:t>PREP: a clean Learner Lab open, the approved baseline template + the improvement change ready to load,</a:t>
+            </a:r>
+          </a:p>
+          <a:p>
+            <a:r>
+              <a:t>Region set to us-east-1. ~10–12 min to deploy + change-set + narrate before the activity. If a deploy is</a:t>
+            </a:r>
+          </a:p>
+          <a:p>
+            <a:r>
+              <a:t>slow, have a pre-deployed baseline stack ready so the change-set step isn't rushed.</a:t>
+            </a:r>
+          </a:p>
+        </p:txBody>
+      </p:sp>
+      <p:sp>
+        <p:nvSpPr>
+          <p:cNvPr id="4" name="Slide Number Placeholder 3"/>
+          <p:cNvSpPr>
+            <a:spLocks noGrp="1"/>
+          </p:cNvSpPr>
+          <p:nvPr>
+            <p:ph type="sldNum" idx="5" sz="quarter"/>
+          </p:nvPr>
+        </p:nvSpPr>
+        <p:spPr/>
+      </p:sp>
+    </p:spTree>
+  </p:cSld>
+  <p:clrMapOvr>
+    <a:masterClrMapping/>
+  </p:clrMapOvr>
+</p:notes>
+</file>
+
+<file path=ppt/notesSlides/notesSlide5.xml><?xml version="1.0" encoding="utf-8"?>
+<p:notes xmlns:a="http://schemas.openxmlformats.org/drawingml/2006/main" xmlns:p="http://schemas.openxmlformats.org/presentationml/2006/main" xmlns:r="http://schemas.openxmlformats.org/officeDocument/2006/relationships">
+  <p:cSld>
+    <p:spTree>
+      <p:nvGrpSpPr>
+        <p:cNvPr id="1" name=""/>
+        <p:cNvGrpSpPr/>
+        <p:nvPr/>
+      </p:nvGrpSpPr>
+      <p:grpSpPr>
+        <a:xfrm>
+          <a:off x="0" y="0"/>
+          <a:ext cx="0" cy="0"/>
+          <a:chOff x="0" y="0"/>
+          <a:chExt cx="0" cy="0"/>
+        </a:xfrm>
+      </p:grpSpPr>
+      <p:sp>
+        <p:nvSpPr>
+          <p:cNvPr id="2" name="Slide Image Placeholder 1"/>
+          <p:cNvSpPr>
+            <a:spLocks noGrp="1"/>
+          </p:cNvSpPr>
+          <p:nvPr>
+            <p:ph type="sldImg" idx="2"/>
+          </p:nvPr>
+        </p:nvSpPr>
+        <p:spPr/>
+      </p:sp>
+      <p:sp>
+        <p:nvSpPr>
+          <p:cNvPr id="3" name="Notes Placeholder 2"/>
+          <p:cNvSpPr>
+            <a:spLocks noGrp="1"/>
+          </p:cNvSpPr>
+          <p:nvPr>
+            <p:ph type="body" idx="3" sz="quarter"/>
+          </p:nvPr>
+        </p:nvSpPr>
+        <p:spPr/>
+        <p:txBody>
+          <a:bodyPr/>
+          <a:lstStyle/>
+          <a:p>
+            <a:r>
+              <a:t>Facilitation — the C1 practice; students do what you just demoed, on the PRACTICE engagement (the</a:t>
+            </a:r>
+          </a:p>
+          <a:p>
+            <a:r>
+              <a:t>website), in us-east-1.</a:t>
+            </a:r>
+          </a:p>
+          <a:p>
+            <a:r>
+              <a:t>Tell students, in these words: "On the practice engagement, deploy the single-AZ baseline, then apply</a:t>
+            </a:r>
+          </a:p>
+          <a:p>
+            <a:r>
+              <a:t>YOUR OWN improvement as a change-set in us-east-1. Review the diff before you execute, confirm it</a:t>
+            </a:r>
+          </a:p>
+          <a:p>
+            <a:r>
+              <a:t>applies the changes you intended, and check the improvement is live."</a:t>
+            </a:r>
+          </a:p>
+          <a:p>
+            <a:r>
+              <a:t>Steps (put on the board):</a:t>
+            </a:r>
+          </a:p>
+          <a:p>
+            <a:r>
+              <a:t>1. Deploy the single-AZ baseline to CREATE_COMPLETE (Region us-east-1 — [scenario: ap-southeast-2</a:t>
+            </a:r>
+          </a:p>
+          <a:p>
+            <a:r>
+              <a:t>(Sydney) | deploy: us-east-1]).</a:t>
+            </a:r>
+          </a:p>
+          <a:p>
+            <a:r>
+              <a:t>2. Create a change-set for your improvement; REVIEW the diff.</a:t>
+            </a:r>
+          </a:p>
+          <a:p>
+            <a:r>
+              <a:t>3. Note which changes are in-place MODIFIES vs REPLACEMENTS; confirm the DB isn't being modified.</a:t>
+            </a:r>
+          </a:p>
+          <a:p>
+            <a:r>
+              <a:t>4. Execute; confirm the improvement is live.</a:t>
+            </a:r>
+          </a:p>
+          <a:p>
+            <a:r>
+              <a:t>Must produce: a deployed baseline, a reviewed change-set, and evidence the improvement applied (diff</a:t>
+            </a:r>
+          </a:p>
+          <a:p>
+            <a:r>
+              <a:t>screenshot + the live improved resources) — the practice version of the AT3 deploy.</a:t>
+            </a:r>
+          </a:p>
+          <a:p>
+            <a:r>
+              <a:t>Timing: ~35 min. Where they get stuck: the baseline deploy is slow (have them start it, then read the</a:t>
+            </a:r>
+          </a:p>
+          <a:p>
+            <a:r>
+              <a:t>diff of a prepared change-set while it runs); they execute WITHOUT reading the diff (stop them —</a:t>
+            </a:r>
+          </a:p>
+          <a:p>
+            <a:r>
+              <a:t>reviewing it is the point); and a change that would REPLACE a resource surprises them — make them notice</a:t>
+            </a:r>
+          </a:p>
+          <a:p>
+            <a:r>
+              <a:t>it in the diff.</a:t>
+            </a:r>
+          </a:p>
+          <a:p>
+            <a:r>
+              <a:t>Share-back prompt: ask one student which line of their diff was a modify and which (if any) was a</a:t>
+            </a:r>
+          </a:p>
+          <a:p>
+            <a:r>
+              <a:t>replace, and what that means for data.</a:t>
+            </a:r>
+          </a:p>
+          <a:p>
+            <a:r>
+              <a:t>No-leakage note: the website is the PRACTICE vehicle — AT3 assesses the same deploy on the Ledgerline</a:t>
+            </a:r>
+          </a:p>
+          <a:p>
+            <a:r>
+              <a:t>system (comparable, not identical); keep them on the practice engagement here.</a:t>
+            </a:r>
+          </a:p>
+        </p:txBody>
+      </p:sp>
+      <p:sp>
+        <p:nvSpPr>
+          <p:cNvPr id="4" name="Slide Number Placeholder 3"/>
+          <p:cNvSpPr>
+            <a:spLocks noGrp="1"/>
+          </p:cNvSpPr>
+          <p:nvPr>
+            <p:ph type="sldNum" idx="5" sz="quarter"/>
+          </p:nvPr>
+        </p:nvSpPr>
+        <p:spPr/>
+      </p:sp>
+    </p:spTree>
+  </p:cSld>
+  <p:clrMapOvr>
+    <a:masterClrMapping/>
+  </p:clrMapOvr>
+</p:notes>
+</file>
+
+<file path=ppt/notesSlides/notesSlide6.xml><?xml version="1.0" encoding="utf-8"?>
+<p:notes xmlns:a="http://schemas.openxmlformats.org/drawingml/2006/main" xmlns:p="http://schemas.openxmlformats.org/presentationml/2006/main" xmlns:r="http://schemas.openxmlformats.org/officeDocument/2006/relationships">
+  <p:cSld>
+    <p:spTree>
+      <p:nvGrpSpPr>
+        <p:cNvPr id="1" name=""/>
+        <p:cNvGrpSpPr/>
+        <p:nvPr/>
+      </p:nvGrpSpPr>
+      <p:grpSpPr>
+        <a:xfrm>
+          <a:off x="0" y="0"/>
+          <a:ext cx="0" cy="0"/>
+          <a:chOff x="0" y="0"/>
+          <a:chExt cx="0" cy="0"/>
+        </a:xfrm>
+      </p:grpSpPr>
+      <p:sp>
+        <p:nvSpPr>
+          <p:cNvPr id="2" name="Slide Image Placeholder 1"/>
+          <p:cNvSpPr>
+            <a:spLocks noGrp="1"/>
+          </p:cNvSpPr>
+          <p:nvPr>
+            <p:ph type="sldImg" idx="2"/>
+          </p:nvPr>
+        </p:nvSpPr>
+        <p:spPr/>
+      </p:sp>
+      <p:sp>
+        <p:nvSpPr>
+          <p:cNvPr id="3" name="Notes Placeholder 2"/>
+          <p:cNvSpPr>
+            <a:spLocks noGrp="1"/>
+          </p:cNvSpPr>
+          <p:nvPr>
+            <p:ph type="body" idx="3" sz="quarter"/>
+          </p:nvPr>
+        </p:nvSpPr>
+        <p:spPr/>
+        <p:txBody>
+          <a:bodyPr/>
+          <a:lstStyle/>
+          <a:p>
+            <a:r>
+              <a:t>Open Section 2 — a deploy has to PROVE the improvement, not just exist. PC 3.2 and KE 10 land here.</a:t>
+            </a:r>
+          </a:p>
+          <a:p>
+            <a:r>
+              <a:t>• First bullet: monitor and measure the architecture against the PERFORMANCE METRICS and BUSINESS</a:t>
+            </a:r>
+          </a:p>
+          <a:p>
+            <a:r>
+              <a:t>GOALS set at AT1 — the deploy proves the improvement against the targets you already agreed.</a:t>
+            </a:r>
+          </a:p>
+          <a:p>
+            <a:r>
+              <a:t>• Second bullet: use industry-standard metrics, methods and monitoring techniques for cloud resources</a:t>
+            </a:r>
+          </a:p>
+          <a:p>
+            <a:r>
+              <a:t>(KE 10) — CloudWatch metrics, alarms and dashboards. Name the tooling.</a:t>
+            </a:r>
+          </a:p>
+          <a:p>
+            <a:r>
+              <a:t>• Third bullet: pick the metrics that MAP to each goal — latency/throughput for performance,</a:t>
+            </a:r>
+          </a:p>
+          <a:p>
+            <a:r>
+              <a:t>healthy-host count for reliability. A metric with no goal behind it is noise.</a:t>
+            </a:r>
+          </a:p>
+          <a:p>
+            <a:r>
+              <a:t>Misconception to pre-empt: "monitoring = turn on CloudWatch and collect everything." No — you measure</a:t>
+            </a:r>
+          </a:p>
+          <a:p>
+            <a:r>
+              <a:t>against the AT1 goals; the skill is choosing the metric that evidences a specific goal, not maximising</a:t>
+            </a:r>
+          </a:p>
+          <a:p>
+            <a:r>
+              <a:t>data.</a:t>
+            </a:r>
+          </a:p>
+          <a:p>
+            <a:r>
+              <a:t>Question to pose: "Your AT1 goal was 'improve availability' — which specific metric proves it, and what</a:t>
+            </a:r>
+          </a:p>
+          <a:p>
+            <a:r>
+              <a:t>alarm threshold would you set?" (ties a goal to a metric to a threshold).</a:t>
+            </a:r>
+          </a:p>
+          <a:p>
+            <a:r>
+              <a:t>UoC/AT3 tie: ICTCLD504 PC 3.2 + KE 10 (monitor/measure against metrics and business goals) → the</a:t>
+            </a:r>
+          </a:p>
+          <a:p>
+            <a:r>
+              <a:t>monitoring evidence in the AT3 record.</a:t>
+            </a:r>
+          </a:p>
+        </p:txBody>
+      </p:sp>
+      <p:sp>
+        <p:nvSpPr>
+          <p:cNvPr id="4" name="Slide Number Placeholder 3"/>
+          <p:cNvSpPr>
+            <a:spLocks noGrp="1"/>
+          </p:cNvSpPr>
+          <p:nvPr>
+            <p:ph type="sldNum" idx="5" sz="quarter"/>
+          </p:nvPr>
+        </p:nvSpPr>
+        <p:spPr/>
+      </p:sp>
+    </p:spTree>
+  </p:cSld>
+  <p:clrMapOvr>
+    <a:masterClrMapping/>
+  </p:clrMapOvr>
+</p:notes>
+</file>
+
+<file path=ppt/notesSlides/notesSlide7.xml><?xml version="1.0" encoding="utf-8"?>
+<p:notes xmlns:a="http://schemas.openxmlformats.org/drawingml/2006/main" xmlns:p="http://schemas.openxmlformats.org/presentationml/2006/main" xmlns:r="http://schemas.openxmlformats.org/officeDocument/2006/relationships">
+  <p:cSld>
+    <p:spTree>
+      <p:nvGrpSpPr>
+        <p:cNvPr id="1" name=""/>
+        <p:cNvGrpSpPr/>
+        <p:nvPr/>
+      </p:nvGrpSpPr>
+      <p:grpSpPr>
+        <a:xfrm>
+          <a:off x="0" y="0"/>
+          <a:ext cx="0" cy="0"/>
+          <a:chOff x="0" y="0"/>
+          <a:chExt cx="0" cy="0"/>
+        </a:xfrm>
+      </p:grpSpPr>
+      <p:sp>
+        <p:nvSpPr>
+          <p:cNvPr id="2" name="Slide Image Placeholder 1"/>
+          <p:cNvSpPr>
+            <a:spLocks noGrp="1"/>
+          </p:cNvSpPr>
+          <p:nvPr>
+            <p:ph type="sldImg" idx="2"/>
+          </p:nvPr>
+        </p:nvSpPr>
+        <p:spPr/>
+      </p:sp>
+      <p:sp>
+        <p:nvSpPr>
+          <p:cNvPr id="3" name="Notes Placeholder 2"/>
+          <p:cNvSpPr>
+            <a:spLocks noGrp="1"/>
+          </p:cNvSpPr>
+          <p:nvPr>
+            <p:ph type="body" idx="3" sz="quarter"/>
+          </p:nvPr>
+        </p:nvSpPr>
+        <p:spPr/>
+        <p:txBody>
+          <a:bodyPr/>
+          <a:lstStyle/>
+          <a:p>
+            <a:r>
+              <a:t>The how-to for Section 2 — point monitoring at the ACTUAL deployed resources and read them against</a:t>
+            </a:r>
+          </a:p>
+          <a:p>
+            <a:r>
+              <a:t>targets.</a:t>
+            </a:r>
+          </a:p>
+          <a:p>
+            <a:r>
+              <a:t>• First bullet: point CloudWatch at the deployed resources — CPU/latency/request counts on the app</a:t>
+            </a:r>
+          </a:p>
+          <a:p>
+            <a:r>
+              <a:t>tier; alarm on the thresholds the AT1 goals imply. Concrete metrics on concrete resources.</a:t>
+            </a:r>
+          </a:p>
+          <a:p>
+            <a:r>
+              <a:t>• Second bullet (the key discipline): a metric is only useful AGAINST A TARGET — record the BASELINE</a:t>
+            </a:r>
+          </a:p>
+          <a:p>
+            <a:r>
+              <a:t>reading, then the POST-IMPROVEMENT reading, and compare. Before/after is what proves the improvement.</a:t>
+            </a:r>
+          </a:p>
+          <a:p>
+            <a:r>
+              <a:t>• Third bullet: monitoring is EVIDENCE — these readings become part of the AT3 implementation record.</a:t>
+            </a:r>
+          </a:p>
+          <a:p>
+            <a:r>
+              <a:t>Capture them as you go.</a:t>
+            </a:r>
+          </a:p>
+          <a:p>
+            <a:r>
+              <a:t>Misconception to pre-empt: "one post-improvement reading proves the improvement." No — without the</a:t>
+            </a:r>
+          </a:p>
+          <a:p>
+            <a:r>
+              <a:t>baseline reading you have nothing to compare to; the before/after pair is the proof.</a:t>
+            </a:r>
+          </a:p>
+          <a:p>
+            <a:r>
+              <a:t>Question to pose: "You added app-tier scaling — what two readings do you need to show it helped, and</a:t>
+            </a:r>
+          </a:p>
+          <a:p>
+            <a:r>
+              <a:t>when do you take each?" (draws out baseline vs post-improvement).</a:t>
+            </a:r>
+          </a:p>
+          <a:p>
+            <a:r>
+              <a:t>UoC/AT3 tie: ICTCLD504 PC 3.2 + KE 10 → the baseline / post-improvement readings evidenced in the AT3</a:t>
+            </a:r>
+          </a:p>
+          <a:p>
+            <a:r>
+              <a:t>record.</a:t>
+            </a:r>
+          </a:p>
+        </p:txBody>
+      </p:sp>
+      <p:sp>
+        <p:nvSpPr>
+          <p:cNvPr id="4" name="Slide Number Placeholder 3"/>
+          <p:cNvSpPr>
+            <a:spLocks noGrp="1"/>
+          </p:cNvSpPr>
+          <p:nvPr>
+            <p:ph type="sldNum" idx="5" sz="quarter"/>
+          </p:nvPr>
+        </p:nvSpPr>
+        <p:spPr/>
+      </p:sp>
+    </p:spTree>
+  </p:cSld>
+  <p:clrMapOvr>
+    <a:masterClrMapping/>
+  </p:clrMapOvr>
+</p:notes>
+</file>
+
+<file path=ppt/notesSlides/notesSlide8.xml><?xml version="1.0" encoding="utf-8"?>
+<p:notes xmlns:a="http://schemas.openxmlformats.org/drawingml/2006/main" xmlns:p="http://schemas.openxmlformats.org/presentationml/2006/main" xmlns:r="http://schemas.openxmlformats.org/officeDocument/2006/relationships">
+  <p:cSld>
+    <p:spTree>
+      <p:nvGrpSpPr>
+        <p:cNvPr id="1" name=""/>
+        <p:cNvGrpSpPr/>
+        <p:nvPr/>
+      </p:nvGrpSpPr>
+      <p:grpSpPr>
+        <a:xfrm>
+          <a:off x="0" y="0"/>
+          <a:ext cx="0" cy="0"/>
+          <a:chOff x="0" y="0"/>
+          <a:chExt cx="0" cy="0"/>
+        </a:xfrm>
+      </p:grpSpPr>
+      <p:sp>
+        <p:nvSpPr>
+          <p:cNvPr id="2" name="Slide Image Placeholder 1"/>
+          <p:cNvSpPr>
+            <a:spLocks noGrp="1"/>
+          </p:cNvSpPr>
+          <p:nvPr>
+            <p:ph type="sldImg" idx="2"/>
+          </p:nvPr>
+        </p:nvSpPr>
+        <p:spPr/>
+      </p:sp>
+      <p:sp>
+        <p:nvSpPr>
+          <p:cNvPr id="3" name="Notes Placeholder 2"/>
+          <p:cNvSpPr>
+            <a:spLocks noGrp="1"/>
+          </p:cNvSpPr>
+          <p:nvPr>
+            <p:ph type="body" idx="3" sz="quarter"/>
+          </p:nvPr>
+        </p:nvSpPr>
+        <p:spPr/>
+        <p:txBody>
+          <a:bodyPr/>
+          <a:lstStyle/>
+          <a:p>
+            <a:r>
+              <a:t>Open Section 3 — PROVE the four concerns on the running system. PC 3.3, PE 2 and KE 7 land here.</a:t>
+            </a:r>
+          </a:p>
+          <a:p>
+            <a:r>
+              <a:t>• First bullet: test and demonstrate the SECURITY, RELIABILITY, SCALABILITY and COST OPTIMISATION of</a:t>
+            </a:r>
+          </a:p>
+          <a:p>
+            <a:r>
+              <a:t>the deployed resources (PC 3.3) — deploy, test and measure the design against its principles, metrics</a:t>
+            </a:r>
+          </a:p>
+          <a:p>
+            <a:r>
+              <a:t>and goals (PE 2). Four concerns, all demonstrated.</a:t>
+            </a:r>
+          </a:p>
+          <a:p>
+            <a:r>
+              <a:t>• Second bullet (the headline): RELIABILITY — fail/remove one app-tier instance and show the Multi-AZ</a:t>
+            </a:r>
+          </a:p>
+          <a:p>
+            <a:r>
+              <a:t>deployment stays available — a technique to AVOID A SINGLE POINT OF FAILURE (KE 7). This is the marquee</a:t>
+            </a:r>
+          </a:p>
+          <a:p>
+            <a:r>
+              <a:t>test.</a:t>
+            </a:r>
+          </a:p>
+          <a:p>
+            <a:r>
+              <a:t>• Third bullet: SCALABILITY — drive load and show the app tier scales; COST — show the improvement's</a:t>
+            </a:r>
+          </a:p>
+          <a:p>
+            <a:r>
+              <a:t>cost against the goal. Each concern gets a demonstration.</a:t>
+            </a:r>
+          </a:p>
+          <a:p>
+            <a:r>
+              <a:t>Misconception to pre-empt: "demonstrating reliability means saying it's reliable." No — you have to</a:t>
+            </a:r>
+          </a:p>
+          <a:p>
+            <a:r>
+              <a:t>SHOW it: kill an instance and show continued availability. A claim isn't a demonstration.</a:t>
+            </a:r>
+          </a:p>
+          <a:p>
+            <a:r>
+              <a:t>Question to pose: "How do you PROVE, not assert, that the app tier has no single point of failure?"</a:t>
+            </a:r>
+          </a:p>
+          <a:p>
+            <a:r>
+              <a:t>(draws out the fail-an-instance SPOF test).</a:t>
+            </a:r>
+          </a:p>
+          <a:p>
+            <a:r>
+              <a:t>UoC/AT3 tie: ICTCLD504 PC 3.3 + PE 2 + KE 7 → the test-and-demonstrate evidence across the four</a:t>
+            </a:r>
+          </a:p>
+          <a:p>
+            <a:r>
+              <a:t>concerns in AT3.</a:t>
+            </a:r>
+          </a:p>
+        </p:txBody>
+      </p:sp>
+      <p:sp>
+        <p:nvSpPr>
+          <p:cNvPr id="4" name="Slide Number Placeholder 3"/>
+          <p:cNvSpPr>
+            <a:spLocks noGrp="1"/>
+          </p:cNvSpPr>
+          <p:nvPr>
+            <p:ph type="sldNum" idx="5" sz="quarter"/>
+          </p:nvPr>
+        </p:nvSpPr>
+        <p:spPr/>
+      </p:sp>
+    </p:spTree>
+  </p:cSld>
+  <p:clrMapOvr>
+    <a:masterClrMapping/>
+  </p:clrMapOvr>
+</p:notes>
+</file>
+
+<file path=ppt/notesSlides/notesSlide9.xml><?xml version="1.0" encoding="utf-8"?>
+<p:notes xmlns:a="http://schemas.openxmlformats.org/drawingml/2006/main" xmlns:p="http://schemas.openxmlformats.org/presentationml/2006/main" xmlns:r="http://schemas.openxmlformats.org/officeDocument/2006/relationships">
+  <p:cSld>
+    <p:spTree>
+      <p:nvGrpSpPr>
+        <p:cNvPr id="1" name=""/>
+        <p:cNvGrpSpPr/>
+        <p:nvPr/>
+      </p:nvGrpSpPr>
+      <p:grpSpPr>
+        <a:xfrm>
+          <a:off x="0" y="0"/>
+          <a:ext cx="0" cy="0"/>
+          <a:chOff x="0" y="0"/>
+          <a:chExt cx="0" cy="0"/>
+        </a:xfrm>
+      </p:grpSpPr>
+      <p:sp>
+        <p:nvSpPr>
+          <p:cNvPr id="2" name="Slide Image Placeholder 1"/>
+          <p:cNvSpPr>
+            <a:spLocks noGrp="1"/>
+          </p:cNvSpPr>
+          <p:nvPr>
+            <p:ph type="sldImg" idx="2"/>
+          </p:nvPr>
+        </p:nvSpPr>
+        <p:spPr/>
+      </p:sp>
+      <p:sp>
+        <p:nvSpPr>
+          <p:cNvPr id="3" name="Notes Placeholder 2"/>
+          <p:cNvSpPr>
+            <a:spLocks noGrp="1"/>
+          </p:cNvSpPr>
+          <p:nvPr>
+            <p:ph type="body" idx="3" sz="quarter"/>
+          </p:nvPr>
+        </p:nvSpPr>
+        <p:spPr/>
+        <p:txBody>
+          <a:bodyPr/>
+          <a:lstStyle/>
+          <a:p>
+            <a:r>
+              <a:t>The technique slide for Section 3 — give a repeatable testing/debugging method (KE 7) and place the</a:t>
+            </a:r>
+          </a:p>
+          <a:p>
+            <a:r>
+              <a:t>SPOF test.</a:t>
+            </a:r>
+          </a:p>
+          <a:p>
+            <a:r>
+              <a:t>• First bullet: apply testing/debugging techniques to the deployed system — reproduce, isolate, read</a:t>
+            </a:r>
+          </a:p>
+          <a:p>
+            <a:r>
+              <a:t>the logs/metrics, confirm the fix (KE 7). A four-step debugging loop.</a:t>
+            </a:r>
+          </a:p>
+          <a:p>
+            <a:r>
+              <a:t>• Second bullet: the SPOF test is the headline — and because the DB tier is CREATE-ONLY here, the</a:t>
+            </a:r>
+          </a:p>
+          <a:p>
+            <a:r>
+              <a:t>reliability demonstration lands on the APP tier (DB-tier DR stays design-level). Same constraint as C1,</a:t>
+            </a:r>
+          </a:p>
+          <a:p>
+            <a:r>
+              <a:t>restated where it bites.</a:t>
+            </a:r>
+          </a:p>
+          <a:p>
+            <a:r>
+              <a:t>• Third bullet: every test produces a RESULT you can act on — that feeds C4 (short-term refinements).</a:t>
+            </a:r>
+          </a:p>
+          <a:p>
+            <a:r>
+              <a:t>Testing isn't the end; it drives the refine loop.</a:t>
+            </a:r>
+          </a:p>
+          <a:p>
+            <a:r>
+              <a:t>Misconception to pre-empt: "debugging is random poking until it works." No — reproduce → isolate → read</a:t>
+            </a:r>
+          </a:p>
+          <a:p>
+            <a:r>
+              <a:t>logs/metrics → confirm; a method you can evidence, not trial and error.</a:t>
+            </a:r>
+          </a:p>
+          <a:p>
+            <a:r>
+              <a:t>Question to pose: "Your SPOF test shows a slow failover — walk the reproduce → isolate → read → confirm</a:t>
+            </a:r>
+          </a:p>
+          <a:p>
+            <a:r>
+              <a:t>loop on it" (rehearses the technique; leads into C4).</a:t>
+            </a:r>
+          </a:p>
+          <a:p>
+            <a:r>
+              <a:t>UoC/AT3 tie: ICTCLD504 KE 7 + PC 3.3 + PE 2 → the testing/debugging evidence in AT3; feeds the</a:t>
+            </a:r>
+          </a:p>
+          <a:p>
+            <a:r>
+              <a:t>refinements in C4.</a:t>
+            </a:r>
+          </a:p>
+        </p:txBody>
+      </p:sp>
+      <p:sp>
+        <p:nvSpPr>
+          <p:cNvPr id="4" name="Slide Number Placeholder 3"/>
+          <p:cNvSpPr>
+            <a:spLocks noGrp="1"/>
+          </p:cNvSpPr>
+          <p:nvPr>
+            <p:ph type="sldNum" idx="5" sz="quarter"/>
+          </p:nvPr>
+        </p:nvSpPr>
+        <p:spPr/>
+      </p:sp>
+    </p:spTree>
+  </p:cSld>
+  <p:clrMapOvr>
+    <a:masterClrMapping/>
+  </p:clrMapOvr>
+</p:notes>
 </file>
 
 <file path=ppt/slideLayouts/slideLayout1.xml><?xml version="1.0" encoding="utf-8"?>
@@ -8815,4 +10638,324 @@
   </a:objectDefaults>
   <a:extraClrSchemeLst/>
 </a:theme>
+</file>
+
+<file path=ppt/theme/theme2.xml><?xml version="1.0" encoding="utf-8"?>
+<a:theme xmlns:a="http://schemas.openxmlformats.org/drawingml/2006/main" name="Office Theme">
+  <a:themeElements>
+    <a:clrScheme name="Office">
+      <a:dk1>
+        <a:sysClr val="windowText" lastClr="000000"/>
+      </a:dk1>
+      <a:lt1>
+        <a:sysClr val="window" lastClr="FFFFFF"/>
+      </a:lt1>
+      <a:dk2>
+        <a:srgbClr val="1F497D"/>
+      </a:dk2>
+      <a:lt2>
+        <a:srgbClr val="EEECE1"/>
+      </a:lt2>
+      <a:accent1>
+        <a:srgbClr val="4F81BD"/>
+      </a:accent1>
+      <a:accent2>
+        <a:srgbClr val="C0504D"/>
+      </a:accent2>
+      <a:accent3>
+        <a:srgbClr val="9BBB59"/>
+      </a:accent3>
+      <a:accent4>
+        <a:srgbClr val="8064A2"/>
+      </a:accent4>
+      <a:accent5>
+        <a:srgbClr val="4BACC6"/>
+      </a:accent5>
+      <a:accent6>
+        <a:srgbClr val="F79646"/>
+      </a:accent6>
+      <a:hlink>
+        <a:srgbClr val="0000FF"/>
+      </a:hlink>
+      <a:folHlink>
+        <a:srgbClr val="800080"/>
+      </a:folHlink>
+    </a:clrScheme>
+    <a:fontScheme name="Office">
+      <a:majorFont>
+        <a:latin typeface="Calibri"/>
+        <a:ea typeface=""/>
+        <a:cs typeface=""/>
+        <a:font script="Jpan" typeface="ＭＳ Ｐゴシック"/>
+        <a:font script="Hang" typeface="맑은 고딕"/>
+        <a:font script="Hans" typeface="宋体"/>
+        <a:font script="Hant" typeface="新細明體"/>
+        <a:font script="Arab" typeface="Times New Roman"/>
+        <a:font script="Hebr" typeface="Times New Roman"/>
+        <a:font script="Thai" typeface="Angsana New"/>
+        <a:font script="Ethi" typeface="Nyala"/>
+        <a:font script="Beng" typeface="Vrinda"/>
+        <a:font script="Gujr" typeface="Shruti"/>
+        <a:font script="Khmr" typeface="MoolBoran"/>
+        <a:font script="Knda" typeface="Tunga"/>
+        <a:font script="Guru" typeface="Raavi"/>
+        <a:font script="Cans" typeface="Euphemia"/>
+        <a:font script="Cher" typeface="Plantagenet Cherokee"/>
+        <a:font script="Yiii" typeface="Microsoft Yi Baiti"/>
+        <a:font script="Tibt" typeface="Microsoft Himalaya"/>
+        <a:font script="Thaa" typeface="MV Boli"/>
+        <a:font script="Deva" typeface="Mangal"/>
+        <a:font script="Telu" typeface="Gautami"/>
+        <a:font script="Taml" typeface="Latha"/>
+        <a:font script="Syrc" typeface="Estrangelo Edessa"/>
+        <a:font script="Orya" typeface="Kalinga"/>
+        <a:font script="Mlym" typeface="Kartika"/>
+        <a:font script="Laoo" typeface="DokChampa"/>
+        <a:font script="Sinh" typeface="Iskoola Pota"/>
+        <a:font script="Mong" typeface="Mongolian Baiti"/>
+        <a:font script="Viet" typeface="Times New Roman"/>
+        <a:font script="Uigh" typeface="Microsoft Uighur"/>
+        <a:font script="Geor" typeface="Sylfaen"/>
+      </a:majorFont>
+      <a:minorFont>
+        <a:latin typeface="Calibri"/>
+        <a:ea typeface=""/>
+        <a:cs typeface=""/>
+        <a:font script="Jpan" typeface="ＭＳ Ｐゴシック"/>
+        <a:font script="Hang" typeface="맑은 고딕"/>
+        <a:font script="Hans" typeface="宋体"/>
+        <a:font script="Hant" typeface="新細明體"/>
+        <a:font script="Arab" typeface="Arial"/>
+        <a:font script="Hebr" typeface="Arial"/>
+        <a:font script="Thai" typeface="Cordia New"/>
+        <a:font script="Ethi" typeface="Nyala"/>
+        <a:font script="Beng" typeface="Vrinda"/>
+        <a:font script="Gujr" typeface="Shruti"/>
+        <a:font script="Khmr" typeface="DaunPenh"/>
+        <a:font script="Knda" typeface="Tunga"/>
+        <a:font script="Guru" typeface="Raavi"/>
+        <a:font script="Cans" typeface="Euphemia"/>
+        <a:font script="Cher" typeface="Plantagenet Cherokee"/>
+        <a:font script="Yiii" typeface="Microsoft Yi Baiti"/>
+        <a:font script="Tibt" typeface="Microsoft Himalaya"/>
+        <a:font script="Thaa" typeface="MV Boli"/>
+        <a:font script="Deva" typeface="Mangal"/>
+        <a:font script="Telu" typeface="Gautami"/>
+        <a:font script="Taml" typeface="Latha"/>
+        <a:font script="Syrc" typeface="Estrangelo Edessa"/>
+        <a:font script="Orya" typeface="Kalinga"/>
+        <a:font script="Mlym" typeface="Kartika"/>
+        <a:font script="Laoo" typeface="DokChampa"/>
+        <a:font script="Sinh" typeface="Iskoola Pota"/>
+        <a:font script="Mong" typeface="Mongolian Baiti"/>
+        <a:font script="Viet" typeface="Arial"/>
+        <a:font script="Uigh" typeface="Microsoft Uighur"/>
+        <a:font script="Geor" typeface="Sylfaen"/>
+      </a:minorFont>
+    </a:fontScheme>
+    <a:fmtScheme name="Office">
+      <a:fillStyleLst>
+        <a:solidFill>
+          <a:schemeClr val="phClr"/>
+        </a:solidFill>
+        <a:gradFill rotWithShape="1">
+          <a:gsLst>
+            <a:gs pos="0">
+              <a:schemeClr val="phClr">
+                <a:tint val="50000"/>
+                <a:satMod val="300000"/>
+              </a:schemeClr>
+            </a:gs>
+            <a:gs pos="35000">
+              <a:schemeClr val="phClr">
+                <a:tint val="37000"/>
+                <a:satMod val="300000"/>
+              </a:schemeClr>
+            </a:gs>
+            <a:gs pos="100000">
+              <a:schemeClr val="phClr">
+                <a:tint val="15000"/>
+                <a:satMod val="350000"/>
+              </a:schemeClr>
+            </a:gs>
+          </a:gsLst>
+          <a:lin ang="16200000" scaled="1"/>
+        </a:gradFill>
+        <a:gradFill rotWithShape="1">
+          <a:gsLst>
+            <a:gs pos="0">
+              <a:schemeClr val="phClr">
+                <a:tint val="100000"/>
+                <a:shade val="100000"/>
+                <a:satMod val="130000"/>
+              </a:schemeClr>
+            </a:gs>
+            <a:gs pos="100000">
+              <a:schemeClr val="phClr">
+                <a:tint val="50000"/>
+                <a:shade val="100000"/>
+                <a:satMod val="350000"/>
+              </a:schemeClr>
+            </a:gs>
+          </a:gsLst>
+          <a:lin ang="16200000" scaled="0"/>
+        </a:gradFill>
+      </a:fillStyleLst>
+      <a:lnStyleLst>
+        <a:ln w="9525" cap="flat" cmpd="sng" algn="ctr">
+          <a:solidFill>
+            <a:schemeClr val="phClr">
+              <a:shade val="95000"/>
+              <a:satMod val="105000"/>
+            </a:schemeClr>
+          </a:solidFill>
+          <a:prstDash val="solid"/>
+        </a:ln>
+        <a:ln w="25400" cap="flat" cmpd="sng" algn="ctr">
+          <a:solidFill>
+            <a:schemeClr val="phClr"/>
+          </a:solidFill>
+          <a:prstDash val="solid"/>
+        </a:ln>
+        <a:ln w="38100" cap="flat" cmpd="sng" algn="ctr">
+          <a:solidFill>
+            <a:schemeClr val="phClr"/>
+          </a:solidFill>
+          <a:prstDash val="solid"/>
+        </a:ln>
+      </a:lnStyleLst>
+      <a:effectStyleLst>
+        <a:effectStyle>
+          <a:effectLst>
+            <a:outerShdw blurRad="40000" dist="20000" dir="5400000" rotWithShape="0">
+              <a:srgbClr val="000000">
+                <a:alpha val="38000"/>
+              </a:srgbClr>
+            </a:outerShdw>
+          </a:effectLst>
+        </a:effectStyle>
+        <a:effectStyle>
+          <a:effectLst>
+            <a:outerShdw blurRad="40000" dist="23000" dir="5400000" rotWithShape="0">
+              <a:srgbClr val="000000">
+                <a:alpha val="35000"/>
+              </a:srgbClr>
+            </a:outerShdw>
+          </a:effectLst>
+        </a:effectStyle>
+        <a:effectStyle>
+          <a:effectLst>
+            <a:outerShdw blurRad="40000" dist="23000" dir="5400000" rotWithShape="0">
+              <a:srgbClr val="000000">
+                <a:alpha val="35000"/>
+              </a:srgbClr>
+            </a:outerShdw>
+          </a:effectLst>
+          <a:scene3d>
+            <a:camera prst="orthographicFront">
+              <a:rot lat="0" lon="0" rev="0"/>
+            </a:camera>
+            <a:lightRig rig="threePt" dir="t">
+              <a:rot lat="0" lon="0" rev="1200000"/>
+            </a:lightRig>
+          </a:scene3d>
+          <a:sp3d>
+            <a:bevelT w="63500" h="25400"/>
+          </a:sp3d>
+        </a:effectStyle>
+      </a:effectStyleLst>
+      <a:bgFillStyleLst>
+        <a:solidFill>
+          <a:schemeClr val="phClr"/>
+        </a:solidFill>
+        <a:gradFill rotWithShape="1">
+          <a:gsLst>
+            <a:gs pos="0">
+              <a:schemeClr val="phClr">
+                <a:tint val="40000"/>
+                <a:satMod val="350000"/>
+              </a:schemeClr>
+            </a:gs>
+            <a:gs pos="40000">
+              <a:schemeClr val="phClr">
+                <a:tint val="45000"/>
+                <a:shade val="99000"/>
+                <a:satMod val="350000"/>
+              </a:schemeClr>
+            </a:gs>
+            <a:gs pos="100000">
+              <a:schemeClr val="phClr">
+                <a:shade val="20000"/>
+                <a:satMod val="255000"/>
+              </a:schemeClr>
+            </a:gs>
+          </a:gsLst>
+          <a:path path="circle">
+            <a:fillToRect l="50000" t="-80000" r="50000" b="180000"/>
+          </a:path>
+        </a:gradFill>
+        <a:gradFill rotWithShape="1">
+          <a:gsLst>
+            <a:gs pos="0">
+              <a:schemeClr val="phClr">
+                <a:tint val="80000"/>
+                <a:satMod val="300000"/>
+              </a:schemeClr>
+            </a:gs>
+            <a:gs pos="100000">
+              <a:schemeClr val="phClr">
+                <a:shade val="30000"/>
+                <a:satMod val="200000"/>
+              </a:schemeClr>
+            </a:gs>
+          </a:gsLst>
+          <a:path path="circle">
+            <a:fillToRect l="50000" t="50000" r="50000" b="50000"/>
+          </a:path>
+        </a:gradFill>
+      </a:bgFillStyleLst>
+    </a:fmtScheme>
+  </a:themeElements>
+  <a:objectDefaults>
+    <a:spDef>
+      <a:spPr/>
+      <a:bodyPr/>
+      <a:lstStyle/>
+      <a:style>
+        <a:lnRef idx="1">
+          <a:schemeClr val="accent1"/>
+        </a:lnRef>
+        <a:fillRef idx="3">
+          <a:schemeClr val="accent1"/>
+        </a:fillRef>
+        <a:effectRef idx="2">
+          <a:schemeClr val="accent1"/>
+        </a:effectRef>
+        <a:fontRef idx="minor">
+          <a:schemeClr val="lt1"/>
+        </a:fontRef>
+      </a:style>
+    </a:spDef>
+    <a:lnDef>
+      <a:spPr/>
+      <a:bodyPr/>
+      <a:lstStyle/>
+      <a:style>
+        <a:lnRef idx="2">
+          <a:schemeClr val="accent1"/>
+        </a:lnRef>
+        <a:fillRef idx="0">
+          <a:schemeClr val="accent1"/>
+        </a:fillRef>
+        <a:effectRef idx="1">
+          <a:schemeClr val="accent1"/>
+        </a:effectRef>
+        <a:fontRef idx="minor">
+          <a:schemeClr val="tx1"/>
+        </a:fontRef>
+      </a:style>
+    </a:lnDef>
+  </a:objectDefaults>
+  <a:extraClrSchemeLst/>
+</a:theme>
 </file>
--- a/S1-CL3-Cloud-Infrastructure-Improvement/delivery/topic_07/Topic_07_Slides.pptx
+++ b/S1-CL3-Cloud-Infrastructure-Improvement/delivery/topic_07/Topic_07_Slides.pptx
@@ -5875,7 +5875,7 @@
                 </a:solidFill>
                 <a:latin typeface="Roboto"/>
               </a:rPr>
-              <a:t>Test and demonstrate the **security, reliability, scalability and cost optimisation** of the deployed resources (PC 3.3) — deploy, test and measure the design against its principles, metrics and goals (PE 2).</a:t>
+              <a:t>Test and demonstrate the security, reliability, scalability and cost optimisation of the deployed resources (PC 3.3) — deploy, test and measure the design against its principles, metrics and goals (PE 2).</a:t>
             </a:r>
           </a:p>
           <a:p>
@@ -5906,7 +5906,7 @@
                 </a:solidFill>
                 <a:latin typeface="Roboto"/>
               </a:rPr>
-              <a:t>Reliability: fail/remove one app-tier instance and show the Multi-AZ deployment stays available — a **technique to avoid a single point of failure** (KE 7).</a:t>
+              <a:t>Reliability: fail/remove one app-tier instance and show the Multi-AZ deployment stays available — a technique to avoid a single point of failure (KE 7).</a:t>
             </a:r>
           </a:p>
           <a:p>
@@ -6851,7 +6851,7 @@
                 </a:solidFill>
                 <a:latin typeface="Roboto"/>
               </a:rPr>
-              <a:t>Apply **short-term refinements** to the deployed resources according to the test results (PC 3.4) — a threshold tweak, a scaling adjustment, a security-group tightening.</a:t>
+              <a:t>Apply short-term refinements to the deployed resources according to the test results (PC 3.4) — a threshold tweak, a scaling adjustment, a security-group tightening.</a:t>
             </a:r>
           </a:p>
           <a:p>
@@ -7158,7 +7158,7 @@
                 </a:solidFill>
                 <a:latin typeface="Roboto Light"/>
               </a:rPr>
-              <a:t>Deploy the approved baseline first, then apply the improvement as an in-place/additive **change-set** — review the diff before executing.</a:t>
+              <a:t>Deploy the approved baseline first, then apply the improvement as an in-place/additive change-set — review the diff before executing.</a:t>
             </a:r>
           </a:p>
           <a:p>
@@ -7177,7 +7177,7 @@
                 </a:solidFill>
                 <a:latin typeface="Roboto Light"/>
               </a:rPr>
-              <a:t>The lab DB tier is create-only (`rds:ModifyDBInstance` denied) — DB-tier DR stays design-level; the improvement lands on the app tier.</a:t>
+              <a:t>The lab DB tier is create-only (rds:ModifyDBInstance denied) — DB-tier DR stays design-level; the improvement lands on the app tier.</a:t>
             </a:r>
           </a:p>
           <a:p>
@@ -7546,7 +7546,7 @@
                 </a:solidFill>
                 <a:latin typeface="Roboto"/>
               </a:rPr>
-              <a:t>This Topic: stand up the approved Ledgerline baseline, apply the improvement as a **change-set**, then monitor, test and refine.</a:t>
+              <a:t>This Topic: stand up the approved Ledgerline baseline, apply the improvement as a change-set, then monitor, test and refine.</a:t>
             </a:r>
           </a:p>
           <a:p>
@@ -7577,7 +7577,7 @@
                 </a:solidFill>
                 <a:latin typeface="Roboto"/>
               </a:rPr>
-              <a:t>Region substitution applies to every deploy: the design targets Sydney (DR Melbourne), but you build in `[scenario: ap-southeast-2 (Sydney) | deploy: us-east-1]`. Same build, only the console Region differs.</a:t>
+              <a:t>Region substitution applies to every deploy: the design targets Sydney (DR Melbourne), but you build in [scenario: ap-southeast-2 (Sydney) | deploy: us-east-1]. Same build, only the console Region differs.</a:t>
             </a:r>
           </a:p>
           <a:p>
@@ -7608,7 +7608,7 @@
                 </a:solidFill>
                 <a:latin typeface="Roboto"/>
               </a:rPr>
-              <a:t>`teach → demo → practice`: watch the deploy + change-set demo, then do it on the practice engagement.</a:t>
+              <a:t>teach → demo → practice: watch the deploy + change-set demo, then do it on the practice engagement.</a:t>
             </a:r>
           </a:p>
         </p:txBody>
@@ -8204,7 +8204,7 @@
                 </a:solidFill>
                 <a:latin typeface="Roboto"/>
               </a:rPr>
-              <a:t>Deploy the approved baseline first, then apply the improvement **as a change-set** over it — not a fresh, replacing stack.</a:t>
+              <a:t>Deploy the approved baseline first, then apply the improvement as a change-set over it — not a fresh, replacing stack.</a:t>
             </a:r>
           </a:p>
           <a:p>
@@ -8546,7 +8546,7 @@
                 </a:solidFill>
                 <a:latin typeface="Roboto"/>
               </a:rPr>
-              <a:t>The change-set must **not modify the database** — the Learner Lab role denies `rds:ModifyDBInstance`, so the DB tier is create-only.</a:t>
+              <a:t>The change-set must not modify the database — the Learner Lab role denies rds:ModifyDBInstance, so the DB tier is create-only.</a:t>
             </a:r>
           </a:p>
           <a:p>
@@ -8577,7 +8577,7 @@
                 </a:solidFill>
                 <a:latin typeface="Roboto"/>
               </a:rPr>
-              <a:t>DB-tier DR (backup / cross-region) therefore stays **design-level** (per AT1), demonstrated on the app tier.</a:t>
+              <a:t>DB-tier DR (backup / cross-region) therefore stays design-level (per AT1), demonstrated on the app tier.</a:t>
             </a:r>
           </a:p>
           <a:p>
@@ -8965,7 +8965,7 @@
                 </a:solidFill>
                 <a:latin typeface="Roboto"/>
               </a:rPr>
-              <a:t>Deploy the approved baseline stack in the lab to CREATE_COMPLETE (`[scenario: ap-southeast-2 (Sydney) | deploy: us-east-1]`).</a:t>
+              <a:t>Deploy the approved baseline stack in the lab to CREATE_COMPLETE ([scenario: ap-southeast-2 (Sydney) | deploy: us-east-1]).</a:t>
             </a:r>
           </a:p>
           <a:p>
@@ -10123,7 +10123,7 @@
                 </a:solidFill>
                 <a:latin typeface="Roboto"/>
               </a:rPr>
-              <a:t>Monitor and measure the architecture against the **performance metrics and business goals set at AT1** — the deploy has to prove the improvement, not just exist.</a:t>
+              <a:t>Monitor and measure the architecture against the performance metrics and business goals set at AT1 — the deploy has to prove the improvement, not just exist.</a:t>
             </a:r>
           </a:p>
           <a:p>
